--- a/python/PythonIntro.pptx
+++ b/python/PythonIntro.pptx
@@ -7,24 +7,28 @@
   <p:sldIdLst>
     <p:sldId id="256" r:id="rId2"/>
     <p:sldId id="257" r:id="rId3"/>
-    <p:sldId id="258" r:id="rId4"/>
-    <p:sldId id="259" r:id="rId5"/>
-    <p:sldId id="260" r:id="rId6"/>
-    <p:sldId id="261" r:id="rId7"/>
-    <p:sldId id="263" r:id="rId8"/>
-    <p:sldId id="264" r:id="rId9"/>
-    <p:sldId id="265" r:id="rId10"/>
-    <p:sldId id="266" r:id="rId11"/>
-    <p:sldId id="267" r:id="rId12"/>
-    <p:sldId id="268" r:id="rId13"/>
-    <p:sldId id="269" r:id="rId14"/>
-    <p:sldId id="270" r:id="rId15"/>
-    <p:sldId id="271" r:id="rId16"/>
-    <p:sldId id="262" r:id="rId17"/>
-    <p:sldId id="272" r:id="rId18"/>
-    <p:sldId id="273" r:id="rId19"/>
-    <p:sldId id="274" r:id="rId20"/>
-    <p:sldId id="275" r:id="rId21"/>
+    <p:sldId id="276" r:id="rId4"/>
+    <p:sldId id="277" r:id="rId5"/>
+    <p:sldId id="278" r:id="rId6"/>
+    <p:sldId id="258" r:id="rId7"/>
+    <p:sldId id="259" r:id="rId8"/>
+    <p:sldId id="260" r:id="rId9"/>
+    <p:sldId id="261" r:id="rId10"/>
+    <p:sldId id="279" r:id="rId11"/>
+    <p:sldId id="263" r:id="rId12"/>
+    <p:sldId id="264" r:id="rId13"/>
+    <p:sldId id="265" r:id="rId14"/>
+    <p:sldId id="266" r:id="rId15"/>
+    <p:sldId id="267" r:id="rId16"/>
+    <p:sldId id="268" r:id="rId17"/>
+    <p:sldId id="269" r:id="rId18"/>
+    <p:sldId id="270" r:id="rId19"/>
+    <p:sldId id="271" r:id="rId20"/>
+    <p:sldId id="262" r:id="rId21"/>
+    <p:sldId id="272" r:id="rId22"/>
+    <p:sldId id="273" r:id="rId23"/>
+    <p:sldId id="274" r:id="rId24"/>
+    <p:sldId id="275" r:id="rId25"/>
   </p:sldIdLst>
   <p:sldSz cx="12192000" cy="6858000"/>
   <p:notesSz cx="6858000" cy="9144000"/>
@@ -134,35 +138,20 @@
 <file path=ppt/changesInfos/changesInfo1.xml><?xml version="1.0" encoding="utf-8"?>
 <pc:chgInfo xmlns:a="http://schemas.openxmlformats.org/drawingml/2006/main" xmlns:r="http://schemas.openxmlformats.org/officeDocument/2006/relationships" xmlns:ac="http://schemas.microsoft.com/office/drawing/2013/main/command" xmlns:pc="http://schemas.microsoft.com/office/powerpoint/2013/main/command">
   <pc:docChgLst>
-    <pc:chgData name="Toby Donaldson" userId="2e6e5431-bb17-4c41-9985-d39c50d83c73" providerId="ADAL" clId="{7F9681A8-EEE2-56F4-9B39-ECCBEE0471AC}"/>
-    <pc:docChg chg="undo custSel addSld modSld sldOrd">
-      <pc:chgData name="Toby Donaldson" userId="2e6e5431-bb17-4c41-9985-d39c50d83c73" providerId="ADAL" clId="{7F9681A8-EEE2-56F4-9B39-ECCBEE0471AC}" dt="2026-09-05T21:32:19.792" v="3701" actId="113"/>
+    <pc:chgData name="Toby Donaldson" userId="2e6e5431-bb17-4c41-9985-d39c50d83c73" providerId="ADAL" clId="{F31BC264-820E-54C4-A6D1-F92AF9CC222E}"/>
+    <pc:docChg chg="custSel addSld modSld">
+      <pc:chgData name="Toby Donaldson" userId="2e6e5431-bb17-4c41-9985-d39c50d83c73" providerId="ADAL" clId="{F31BC264-820E-54C4-A6D1-F92AF9CC222E}" dt="2026-09-09T17:09:29.095" v="156" actId="21"/>
       <pc:docMkLst>
         <pc:docMk/>
       </pc:docMkLst>
       <pc:sldChg chg="modSp mod">
-        <pc:chgData name="Toby Donaldson" userId="2e6e5431-bb17-4c41-9985-d39c50d83c73" providerId="ADAL" clId="{7F9681A8-EEE2-56F4-9B39-ECCBEE0471AC}" dt="2026-08-07T22:58:37.312" v="3" actId="20577"/>
-        <pc:sldMkLst>
-          <pc:docMk/>
-          <pc:sldMk cId="917661366" sldId="256"/>
-        </pc:sldMkLst>
-        <pc:spChg chg="mod">
-          <ac:chgData name="Toby Donaldson" userId="2e6e5431-bb17-4c41-9985-d39c50d83c73" providerId="ADAL" clId="{7F9681A8-EEE2-56F4-9B39-ECCBEE0471AC}" dt="2026-08-07T22:58:37.312" v="3" actId="20577"/>
-          <ac:spMkLst>
-            <pc:docMk/>
-            <pc:sldMk cId="917661366" sldId="256"/>
-            <ac:spMk id="3" creationId="{5069060A-1B94-C5E8-1A39-5721CC58FD9A}"/>
-          </ac:spMkLst>
-        </pc:spChg>
-      </pc:sldChg>
-      <pc:sldChg chg="modSp mod">
-        <pc:chgData name="Toby Donaldson" userId="2e6e5431-bb17-4c41-9985-d39c50d83c73" providerId="ADAL" clId="{7F9681A8-EEE2-56F4-9B39-ECCBEE0471AC}" dt="2026-08-07T22:58:47.641" v="9" actId="20577"/>
+        <pc:chgData name="Toby Donaldson" userId="2e6e5431-bb17-4c41-9985-d39c50d83c73" providerId="ADAL" clId="{F31BC264-820E-54C4-A6D1-F92AF9CC222E}" dt="2026-09-09T17:05:05.108" v="5" actId="20577"/>
         <pc:sldMkLst>
           <pc:docMk/>
           <pc:sldMk cId="3882066604" sldId="257"/>
         </pc:sldMkLst>
         <pc:spChg chg="mod">
-          <ac:chgData name="Toby Donaldson" userId="2e6e5431-bb17-4c41-9985-d39c50d83c73" providerId="ADAL" clId="{7F9681A8-EEE2-56F4-9B39-ECCBEE0471AC}" dt="2026-08-07T22:58:47.641" v="9" actId="20577"/>
+          <ac:chgData name="Toby Donaldson" userId="2e6e5431-bb17-4c41-9985-d39c50d83c73" providerId="ADAL" clId="{F31BC264-820E-54C4-A6D1-F92AF9CC222E}" dt="2026-09-09T17:05:05.108" v="5" actId="20577"/>
           <ac:spMkLst>
             <pc:docMk/>
             <pc:sldMk cId="3882066604" sldId="257"/>
@@ -170,6 +159,188 @@
           </ac:spMkLst>
         </pc:spChg>
       </pc:sldChg>
+      <pc:sldChg chg="modSp mod">
+        <pc:chgData name="Toby Donaldson" userId="2e6e5431-bb17-4c41-9985-d39c50d83c73" providerId="ADAL" clId="{F31BC264-820E-54C4-A6D1-F92AF9CC222E}" dt="2026-09-09T17:06:47.399" v="21" actId="20577"/>
+        <pc:sldMkLst>
+          <pc:docMk/>
+          <pc:sldMk cId="3378692664" sldId="260"/>
+        </pc:sldMkLst>
+        <pc:spChg chg="mod">
+          <ac:chgData name="Toby Donaldson" userId="2e6e5431-bb17-4c41-9985-d39c50d83c73" providerId="ADAL" clId="{F31BC264-820E-54C4-A6D1-F92AF9CC222E}" dt="2026-09-09T17:06:47.399" v="21" actId="20577"/>
+          <ac:spMkLst>
+            <pc:docMk/>
+            <pc:sldMk cId="3378692664" sldId="260"/>
+            <ac:spMk id="3" creationId="{64B84B77-0FD8-D56A-EE91-0F618FDAFFF8}"/>
+          </ac:spMkLst>
+        </pc:spChg>
+      </pc:sldChg>
+      <pc:sldChg chg="modSp mod">
+        <pc:chgData name="Toby Donaldson" userId="2e6e5431-bb17-4c41-9985-d39c50d83c73" providerId="ADAL" clId="{F31BC264-820E-54C4-A6D1-F92AF9CC222E}" dt="2026-09-09T17:07:00.457" v="24" actId="20577"/>
+        <pc:sldMkLst>
+          <pc:docMk/>
+          <pc:sldMk cId="1714044195" sldId="261"/>
+        </pc:sldMkLst>
+        <pc:spChg chg="mod">
+          <ac:chgData name="Toby Donaldson" userId="2e6e5431-bb17-4c41-9985-d39c50d83c73" providerId="ADAL" clId="{F31BC264-820E-54C4-A6D1-F92AF9CC222E}" dt="2026-09-09T17:07:00.457" v="24" actId="20577"/>
+          <ac:spMkLst>
+            <pc:docMk/>
+            <pc:sldMk cId="1714044195" sldId="261"/>
+            <ac:spMk id="3" creationId="{7E38AC56-E7BF-C483-FD5A-73282855C224}"/>
+          </ac:spMkLst>
+        </pc:spChg>
+      </pc:sldChg>
+      <pc:sldChg chg="modSp mod">
+        <pc:chgData name="Toby Donaldson" userId="2e6e5431-bb17-4c41-9985-d39c50d83c73" providerId="ADAL" clId="{F31BC264-820E-54C4-A6D1-F92AF9CC222E}" dt="2026-09-09T17:08:52.737" v="152" actId="1076"/>
+        <pc:sldMkLst>
+          <pc:docMk/>
+          <pc:sldMk cId="195079182" sldId="264"/>
+        </pc:sldMkLst>
+        <pc:picChg chg="mod">
+          <ac:chgData name="Toby Donaldson" userId="2e6e5431-bb17-4c41-9985-d39c50d83c73" providerId="ADAL" clId="{F31BC264-820E-54C4-A6D1-F92AF9CC222E}" dt="2026-09-09T17:08:52.737" v="152" actId="1076"/>
+          <ac:picMkLst>
+            <pc:docMk/>
+            <pc:sldMk cId="195079182" sldId="264"/>
+            <ac:picMk id="5" creationId="{4A34FCB8-5F5D-F88F-124D-E2AD4EB7A8E9}"/>
+          </ac:picMkLst>
+        </pc:picChg>
+      </pc:sldChg>
+      <pc:sldChg chg="delSp mod">
+        <pc:chgData name="Toby Donaldson" userId="2e6e5431-bb17-4c41-9985-d39c50d83c73" providerId="ADAL" clId="{F31BC264-820E-54C4-A6D1-F92AF9CC222E}" dt="2026-09-09T17:08:06.453" v="141" actId="21"/>
+        <pc:sldMkLst>
+          <pc:docMk/>
+          <pc:sldMk cId="345430048" sldId="265"/>
+        </pc:sldMkLst>
+        <pc:spChg chg="del">
+          <ac:chgData name="Toby Donaldson" userId="2e6e5431-bb17-4c41-9985-d39c50d83c73" providerId="ADAL" clId="{F31BC264-820E-54C4-A6D1-F92AF9CC222E}" dt="2026-09-09T17:08:06.453" v="141" actId="21"/>
+          <ac:spMkLst>
+            <pc:docMk/>
+            <pc:sldMk cId="345430048" sldId="265"/>
+            <ac:spMk id="7" creationId="{0F03A1C9-9D76-3CE8-4637-59188B5CCBF4}"/>
+          </ac:spMkLst>
+        </pc:spChg>
+      </pc:sldChg>
+      <pc:sldChg chg="modSp mod">
+        <pc:chgData name="Toby Donaldson" userId="2e6e5431-bb17-4c41-9985-d39c50d83c73" providerId="ADAL" clId="{F31BC264-820E-54C4-A6D1-F92AF9CC222E}" dt="2026-09-09T17:08:34.453" v="146" actId="1076"/>
+        <pc:sldMkLst>
+          <pc:docMk/>
+          <pc:sldMk cId="302896912" sldId="266"/>
+        </pc:sldMkLst>
+        <pc:graphicFrameChg chg="modGraphic">
+          <ac:chgData name="Toby Donaldson" userId="2e6e5431-bb17-4c41-9985-d39c50d83c73" providerId="ADAL" clId="{F31BC264-820E-54C4-A6D1-F92AF9CC222E}" dt="2026-09-09T17:08:17.499" v="142" actId="115"/>
+          <ac:graphicFrameMkLst>
+            <pc:docMk/>
+            <pc:sldMk cId="302896912" sldId="266"/>
+            <ac:graphicFrameMk id="4" creationId="{FE348C23-9007-16C3-7F93-9CBE18AD5589}"/>
+          </ac:graphicFrameMkLst>
+        </pc:graphicFrameChg>
+        <pc:picChg chg="mod">
+          <ac:chgData name="Toby Donaldson" userId="2e6e5431-bb17-4c41-9985-d39c50d83c73" providerId="ADAL" clId="{F31BC264-820E-54C4-A6D1-F92AF9CC222E}" dt="2026-09-09T17:08:34.453" v="146" actId="1076"/>
+          <ac:picMkLst>
+            <pc:docMk/>
+            <pc:sldMk cId="302896912" sldId="266"/>
+            <ac:picMk id="5" creationId="{8467E06F-E8BB-16A8-ABB2-8E6DAB17F3CD}"/>
+          </ac:picMkLst>
+        </pc:picChg>
+      </pc:sldChg>
+      <pc:sldChg chg="modSp mod">
+        <pc:chgData name="Toby Donaldson" userId="2e6e5431-bb17-4c41-9985-d39c50d83c73" providerId="ADAL" clId="{F31BC264-820E-54C4-A6D1-F92AF9CC222E}" dt="2026-09-09T17:09:15.743" v="153" actId="14100"/>
+        <pc:sldMkLst>
+          <pc:docMk/>
+          <pc:sldMk cId="1549212929" sldId="268"/>
+        </pc:sldMkLst>
+        <pc:picChg chg="mod">
+          <ac:chgData name="Toby Donaldson" userId="2e6e5431-bb17-4c41-9985-d39c50d83c73" providerId="ADAL" clId="{F31BC264-820E-54C4-A6D1-F92AF9CC222E}" dt="2026-09-09T17:09:15.743" v="153" actId="14100"/>
+          <ac:picMkLst>
+            <pc:docMk/>
+            <pc:sldMk cId="1549212929" sldId="268"/>
+            <ac:picMk id="8" creationId="{7CC3ACD0-31CB-432C-5D03-AA9CD85E6F2E}"/>
+          </ac:picMkLst>
+        </pc:picChg>
+      </pc:sldChg>
+      <pc:sldChg chg="addSp delSp modSp mod">
+        <pc:chgData name="Toby Donaldson" userId="2e6e5431-bb17-4c41-9985-d39c50d83c73" providerId="ADAL" clId="{F31BC264-820E-54C4-A6D1-F92AF9CC222E}" dt="2026-09-09T17:09:29.095" v="156" actId="21"/>
+        <pc:sldMkLst>
+          <pc:docMk/>
+          <pc:sldMk cId="1355049006" sldId="269"/>
+        </pc:sldMkLst>
+        <pc:spChg chg="add del mod">
+          <ac:chgData name="Toby Donaldson" userId="2e6e5431-bb17-4c41-9985-d39c50d83c73" providerId="ADAL" clId="{F31BC264-820E-54C4-A6D1-F92AF9CC222E}" dt="2026-09-09T17:09:29.095" v="156" actId="21"/>
+          <ac:spMkLst>
+            <pc:docMk/>
+            <pc:sldMk cId="1355049006" sldId="269"/>
+            <ac:spMk id="4" creationId="{834157AB-48B9-F966-C280-91B41E366D25}"/>
+          </ac:spMkLst>
+        </pc:spChg>
+        <pc:spChg chg="del mod">
+          <ac:chgData name="Toby Donaldson" userId="2e6e5431-bb17-4c41-9985-d39c50d83c73" providerId="ADAL" clId="{F31BC264-820E-54C4-A6D1-F92AF9CC222E}" dt="2026-09-09T17:09:27.175" v="155" actId="21"/>
+          <ac:spMkLst>
+            <pc:docMk/>
+            <pc:sldMk cId="1355049006" sldId="269"/>
+            <ac:spMk id="7" creationId="{DB532FAD-F0E2-2DBF-E82C-FAF0D61C7492}"/>
+          </ac:spMkLst>
+        </pc:spChg>
+      </pc:sldChg>
+      <pc:sldChg chg="modSp add mod">
+        <pc:chgData name="Toby Donaldson" userId="2e6e5431-bb17-4c41-9985-d39c50d83c73" providerId="ADAL" clId="{F31BC264-820E-54C4-A6D1-F92AF9CC222E}" dt="2026-09-09T17:05:23.631" v="9" actId="20577"/>
+        <pc:sldMkLst>
+          <pc:docMk/>
+          <pc:sldMk cId="818948213" sldId="276"/>
+        </pc:sldMkLst>
+        <pc:spChg chg="mod">
+          <ac:chgData name="Toby Donaldson" userId="2e6e5431-bb17-4c41-9985-d39c50d83c73" providerId="ADAL" clId="{F31BC264-820E-54C4-A6D1-F92AF9CC222E}" dt="2026-09-09T17:05:23.631" v="9" actId="20577"/>
+          <ac:spMkLst>
+            <pc:docMk/>
+            <pc:sldMk cId="818948213" sldId="276"/>
+            <ac:spMk id="3" creationId="{266387C5-BE2D-B798-55FA-B10E30FF4D01}"/>
+          </ac:spMkLst>
+        </pc:spChg>
+      </pc:sldChg>
+      <pc:sldChg chg="modSp add mod">
+        <pc:chgData name="Toby Donaldson" userId="2e6e5431-bb17-4c41-9985-d39c50d83c73" providerId="ADAL" clId="{F31BC264-820E-54C4-A6D1-F92AF9CC222E}" dt="2026-09-09T17:05:36.069" v="11" actId="20577"/>
+        <pc:sldMkLst>
+          <pc:docMk/>
+          <pc:sldMk cId="1089380561" sldId="277"/>
+        </pc:sldMkLst>
+        <pc:spChg chg="mod">
+          <ac:chgData name="Toby Donaldson" userId="2e6e5431-bb17-4c41-9985-d39c50d83c73" providerId="ADAL" clId="{F31BC264-820E-54C4-A6D1-F92AF9CC222E}" dt="2026-09-09T17:05:36.069" v="11" actId="20577"/>
+          <ac:spMkLst>
+            <pc:docMk/>
+            <pc:sldMk cId="1089380561" sldId="277"/>
+            <ac:spMk id="3" creationId="{0EF5B689-9105-7349-C1B4-A0457F81D291}"/>
+          </ac:spMkLst>
+        </pc:spChg>
+      </pc:sldChg>
+      <pc:sldChg chg="add">
+        <pc:chgData name="Toby Donaldson" userId="2e6e5431-bb17-4c41-9985-d39c50d83c73" providerId="ADAL" clId="{F31BC264-820E-54C4-A6D1-F92AF9CC222E}" dt="2026-09-09T17:05:29.736" v="10" actId="2890"/>
+        <pc:sldMkLst>
+          <pc:docMk/>
+          <pc:sldMk cId="1837298015" sldId="278"/>
+        </pc:sldMkLst>
+      </pc:sldChg>
+      <pc:sldChg chg="modSp add mod">
+        <pc:chgData name="Toby Donaldson" userId="2e6e5431-bb17-4c41-9985-d39c50d83c73" providerId="ADAL" clId="{F31BC264-820E-54C4-A6D1-F92AF9CC222E}" dt="2026-09-09T17:07:46.880" v="140" actId="5793"/>
+        <pc:sldMkLst>
+          <pc:docMk/>
+          <pc:sldMk cId="2598496854" sldId="279"/>
+        </pc:sldMkLst>
+        <pc:spChg chg="mod">
+          <ac:chgData name="Toby Donaldson" userId="2e6e5431-bb17-4c41-9985-d39c50d83c73" providerId="ADAL" clId="{F31BC264-820E-54C4-A6D1-F92AF9CC222E}" dt="2026-09-09T17:07:46.880" v="140" actId="5793"/>
+          <ac:spMkLst>
+            <pc:docMk/>
+            <pc:sldMk cId="2598496854" sldId="279"/>
+            <ac:spMk id="3" creationId="{F79ACE95-D459-2473-BBA8-DC3C2BFF366C}"/>
+          </ac:spMkLst>
+        </pc:spChg>
+      </pc:sldChg>
+    </pc:docChg>
+  </pc:docChgLst>
+  <pc:docChgLst>
+    <pc:chgData name="Toby Donaldson" userId="2e6e5431-bb17-4c41-9985-d39c50d83c73" providerId="ADAL" clId="{7F9681A8-EEE2-56F4-9B39-ECCBEE0471AC}"/>
+    <pc:docChg chg="undo custSel addSld modSld sldOrd">
+      <pc:chgData name="Toby Donaldson" userId="2e6e5431-bb17-4c41-9985-d39c50d83c73" providerId="ADAL" clId="{7F9681A8-EEE2-56F4-9B39-ECCBEE0471AC}" dt="2026-09-05T21:32:19.792" v="3701" actId="113"/>
+      <pc:docMkLst>
+        <pc:docMk/>
+      </pc:docMkLst>
       <pc:sldChg chg="modSp mod">
         <pc:chgData name="Toby Donaldson" userId="2e6e5431-bb17-4c41-9985-d39c50d83c73" providerId="ADAL" clId="{7F9681A8-EEE2-56F4-9B39-ECCBEE0471AC}" dt="2026-08-11T23:01:19.344" v="176" actId="20577"/>
         <pc:sldMkLst>
@@ -212,21 +383,6 @@
             <pc:docMk/>
             <pc:sldMk cId="3378692664" sldId="260"/>
             <ac:spMk id="3" creationId="{64B84B77-0FD8-D56A-EE91-0F618FDAFFF8}"/>
-          </ac:spMkLst>
-        </pc:spChg>
-      </pc:sldChg>
-      <pc:sldChg chg="modSp mod">
-        <pc:chgData name="Toby Donaldson" userId="2e6e5431-bb17-4c41-9985-d39c50d83c73" providerId="ADAL" clId="{7F9681A8-EEE2-56F4-9B39-ECCBEE0471AC}" dt="2026-08-07T23:00:41.642" v="96" actId="20577"/>
-        <pc:sldMkLst>
-          <pc:docMk/>
-          <pc:sldMk cId="1714044195" sldId="261"/>
-        </pc:sldMkLst>
-        <pc:spChg chg="mod">
-          <ac:chgData name="Toby Donaldson" userId="2e6e5431-bb17-4c41-9985-d39c50d83c73" providerId="ADAL" clId="{7F9681A8-EEE2-56F4-9B39-ECCBEE0471AC}" dt="2026-08-07T23:00:41.642" v="96" actId="20577"/>
-          <ac:spMkLst>
-            <pc:docMk/>
-            <pc:sldMk cId="1714044195" sldId="261"/>
-            <ac:spMk id="3" creationId="{7E38AC56-E7BF-C483-FD5A-73282855C224}"/>
           </ac:spMkLst>
         </pc:spChg>
       </pc:sldChg>
@@ -688,7 +844,7 @@
           <a:p>
             <a:fld id="{889F9635-12D6-CA48-83F0-27F24E8721A6}" type="datetimeFigureOut">
               <a:rPr lang="en-US" smtClean="0"/>
-              <a:t>9/5/26</a:t>
+              <a:t>9/9/26</a:t>
             </a:fld>
             <a:endParaRPr lang="en-US"/>
           </a:p>
@@ -886,7 +1042,7 @@
           <a:p>
             <a:fld id="{889F9635-12D6-CA48-83F0-27F24E8721A6}" type="datetimeFigureOut">
               <a:rPr lang="en-US" smtClean="0"/>
-              <a:t>9/5/26</a:t>
+              <a:t>9/9/26</a:t>
             </a:fld>
             <a:endParaRPr lang="en-US"/>
           </a:p>
@@ -1094,7 +1250,7 @@
           <a:p>
             <a:fld id="{889F9635-12D6-CA48-83F0-27F24E8721A6}" type="datetimeFigureOut">
               <a:rPr lang="en-US" smtClean="0"/>
-              <a:t>9/5/26</a:t>
+              <a:t>9/9/26</a:t>
             </a:fld>
             <a:endParaRPr lang="en-US"/>
           </a:p>
@@ -1292,7 +1448,7 @@
           <a:p>
             <a:fld id="{889F9635-12D6-CA48-83F0-27F24E8721A6}" type="datetimeFigureOut">
               <a:rPr lang="en-US" smtClean="0"/>
-              <a:t>9/5/26</a:t>
+              <a:t>9/9/26</a:t>
             </a:fld>
             <a:endParaRPr lang="en-US"/>
           </a:p>
@@ -1567,7 +1723,7 @@
           <a:p>
             <a:fld id="{889F9635-12D6-CA48-83F0-27F24E8721A6}" type="datetimeFigureOut">
               <a:rPr lang="en-US" smtClean="0"/>
-              <a:t>9/5/26</a:t>
+              <a:t>9/9/26</a:t>
             </a:fld>
             <a:endParaRPr lang="en-US"/>
           </a:p>
@@ -1832,7 +1988,7 @@
           <a:p>
             <a:fld id="{889F9635-12D6-CA48-83F0-27F24E8721A6}" type="datetimeFigureOut">
               <a:rPr lang="en-US" smtClean="0"/>
-              <a:t>9/5/26</a:t>
+              <a:t>9/9/26</a:t>
             </a:fld>
             <a:endParaRPr lang="en-US"/>
           </a:p>
@@ -2244,7 +2400,7 @@
           <a:p>
             <a:fld id="{889F9635-12D6-CA48-83F0-27F24E8721A6}" type="datetimeFigureOut">
               <a:rPr lang="en-US" smtClean="0"/>
-              <a:t>9/5/26</a:t>
+              <a:t>9/9/26</a:t>
             </a:fld>
             <a:endParaRPr lang="en-US"/>
           </a:p>
@@ -2385,7 +2541,7 @@
           <a:p>
             <a:fld id="{889F9635-12D6-CA48-83F0-27F24E8721A6}" type="datetimeFigureOut">
               <a:rPr lang="en-US" smtClean="0"/>
-              <a:t>9/5/26</a:t>
+              <a:t>9/9/26</a:t>
             </a:fld>
             <a:endParaRPr lang="en-US"/>
           </a:p>
@@ -2498,7 +2654,7 @@
           <a:p>
             <a:fld id="{889F9635-12D6-CA48-83F0-27F24E8721A6}" type="datetimeFigureOut">
               <a:rPr lang="en-US" smtClean="0"/>
-              <a:t>9/5/26</a:t>
+              <a:t>9/9/26</a:t>
             </a:fld>
             <a:endParaRPr lang="en-US"/>
           </a:p>
@@ -2809,7 +2965,7 @@
           <a:p>
             <a:fld id="{889F9635-12D6-CA48-83F0-27F24E8721A6}" type="datetimeFigureOut">
               <a:rPr lang="en-US" smtClean="0"/>
-              <a:t>9/5/26</a:t>
+              <a:t>9/9/26</a:t>
             </a:fld>
             <a:endParaRPr lang="en-US"/>
           </a:p>
@@ -3097,7 +3253,7 @@
           <a:p>
             <a:fld id="{889F9635-12D6-CA48-83F0-27F24E8721A6}" type="datetimeFigureOut">
               <a:rPr lang="en-US" smtClean="0"/>
-              <a:t>9/5/26</a:t>
+              <a:t>9/9/26</a:t>
             </a:fld>
             <a:endParaRPr lang="en-US"/>
           </a:p>
@@ -3338,7 +3494,7 @@
           <a:p>
             <a:fld id="{889F9635-12D6-CA48-83F0-27F24E8721A6}" type="datetimeFigureOut">
               <a:rPr lang="en-US" smtClean="0"/>
-              <a:t>9/5/26</a:t>
+              <a:t>9/9/26</a:t>
             </a:fld>
             <a:endParaRPr lang="en-US"/>
           </a:p>
@@ -3847,6 +4003,862 @@
         <p:cNvPr id="1" name="">
           <a:extLst>
             <a:ext uri="{FF2B5EF4-FFF2-40B4-BE49-F238E27FC236}">
+              <a16:creationId xmlns:a16="http://schemas.microsoft.com/office/drawing/2014/main" id="{0F6EBF03-4170-EF7C-985D-B978BD6B9351}"/>
+            </a:ext>
+          </a:extLst>
+        </p:cNvPr>
+        <p:cNvGrpSpPr/>
+        <p:nvPr/>
+      </p:nvGrpSpPr>
+      <p:grpSpPr>
+        <a:xfrm>
+          <a:off x="0" y="0"/>
+          <a:ext cx="0" cy="0"/>
+          <a:chOff x="0" y="0"/>
+          <a:chExt cx="0" cy="0"/>
+        </a:xfrm>
+      </p:grpSpPr>
+      <p:sp>
+        <p:nvSpPr>
+          <p:cNvPr id="2" name="Title 1">
+            <a:extLst>
+              <a:ext uri="{FF2B5EF4-FFF2-40B4-BE49-F238E27FC236}">
+                <a16:creationId xmlns:a16="http://schemas.microsoft.com/office/drawing/2014/main" id="{8E84544B-482A-87B2-138B-2BBCD69ABA27}"/>
+              </a:ext>
+            </a:extLst>
+          </p:cNvPr>
+          <p:cNvSpPr>
+            <a:spLocks noGrp="1"/>
+          </p:cNvSpPr>
+          <p:nvPr>
+            <p:ph type="title"/>
+          </p:nvPr>
+        </p:nvSpPr>
+        <p:spPr/>
+        <p:txBody>
+          <a:bodyPr/>
+          <a:lstStyle/>
+          <a:p>
+            <a:r>
+              <a:rPr lang="en-US" dirty="0"/>
+              <a:t>Python</a:t>
+            </a:r>
+          </a:p>
+        </p:txBody>
+      </p:sp>
+      <p:sp>
+        <p:nvSpPr>
+          <p:cNvPr id="3" name="Content Placeholder 2">
+            <a:extLst>
+              <a:ext uri="{FF2B5EF4-FFF2-40B4-BE49-F238E27FC236}">
+                <a16:creationId xmlns:a16="http://schemas.microsoft.com/office/drawing/2014/main" id="{F79ACE95-D459-2473-BBA8-DC3C2BFF366C}"/>
+              </a:ext>
+            </a:extLst>
+          </p:cNvPr>
+          <p:cNvSpPr>
+            <a:spLocks noGrp="1"/>
+          </p:cNvSpPr>
+          <p:nvPr>
+            <p:ph idx="1"/>
+          </p:nvPr>
+        </p:nvSpPr>
+        <p:spPr/>
+        <p:txBody>
+          <a:bodyPr/>
+          <a:lstStyle/>
+          <a:p>
+            <a:pPr marL="0" indent="0">
+              <a:buNone/>
+            </a:pPr>
+            <a:r>
+              <a:rPr lang="en-US" dirty="0"/>
+              <a:t>Python was first released in 1991 … here’s what else was happening at that time …</a:t>
+            </a:r>
+          </a:p>
+        </p:txBody>
+      </p:sp>
+    </p:spTree>
+    <p:extLst>
+      <p:ext uri="{BB962C8B-B14F-4D97-AF65-F5344CB8AC3E}">
+        <p14:creationId xmlns:p14="http://schemas.microsoft.com/office/powerpoint/2010/main" val="2598496854"/>
+      </p:ext>
+    </p:extLst>
+  </p:cSld>
+  <p:clrMapOvr>
+    <a:masterClrMapping/>
+  </p:clrMapOvr>
+</p:sld>
+</file>
+
+<file path=ppt/slides/slide11.xml><?xml version="1.0" encoding="utf-8"?>
+<p:sld xmlns:a="http://schemas.openxmlformats.org/drawingml/2006/main" xmlns:r="http://schemas.openxmlformats.org/officeDocument/2006/relationships" xmlns:p="http://schemas.openxmlformats.org/presentationml/2006/main">
+  <p:cSld>
+    <p:spTree>
+      <p:nvGrpSpPr>
+        <p:cNvPr id="1" name=""/>
+        <p:cNvGrpSpPr/>
+        <p:nvPr/>
+      </p:nvGrpSpPr>
+      <p:grpSpPr>
+        <a:xfrm>
+          <a:off x="0" y="0"/>
+          <a:ext cx="0" cy="0"/>
+          <a:chOff x="0" y="0"/>
+          <a:chExt cx="0" cy="0"/>
+        </a:xfrm>
+      </p:grpSpPr>
+      <p:sp>
+        <p:nvSpPr>
+          <p:cNvPr id="2" name="Title 1">
+            <a:extLst>
+              <a:ext uri="{FF2B5EF4-FFF2-40B4-BE49-F238E27FC236}">
+                <a16:creationId xmlns:a16="http://schemas.microsoft.com/office/drawing/2014/main" id="{85165E68-B099-28EA-8CDC-50BE56681467}"/>
+              </a:ext>
+            </a:extLst>
+          </p:cNvPr>
+          <p:cNvSpPr>
+            <a:spLocks noGrp="1"/>
+          </p:cNvSpPr>
+          <p:nvPr>
+            <p:ph type="title"/>
+          </p:nvPr>
+        </p:nvSpPr>
+        <p:spPr/>
+        <p:txBody>
+          <a:bodyPr/>
+          <a:lstStyle/>
+          <a:p>
+            <a:r>
+              <a:rPr lang="en-US" dirty="0"/>
+              <a:t>1991: Top 10 Movies</a:t>
+            </a:r>
+          </a:p>
+        </p:txBody>
+      </p:sp>
+      <p:sp>
+        <p:nvSpPr>
+          <p:cNvPr id="7" name="Content Placeholder 6">
+            <a:extLst>
+              <a:ext uri="{FF2B5EF4-FFF2-40B4-BE49-F238E27FC236}">
+                <a16:creationId xmlns:a16="http://schemas.microsoft.com/office/drawing/2014/main" id="{247EB9EF-1B24-C927-B6E2-1BE0D1D10DFB}"/>
+              </a:ext>
+            </a:extLst>
+          </p:cNvPr>
+          <p:cNvSpPr>
+            <a:spLocks noGrp="1"/>
+          </p:cNvSpPr>
+          <p:nvPr>
+            <p:ph idx="1"/>
+          </p:nvPr>
+        </p:nvSpPr>
+        <p:spPr/>
+        <p:txBody>
+          <a:bodyPr/>
+          <a:lstStyle/>
+          <a:p>
+            <a:endParaRPr lang="en-US"/>
+          </a:p>
+        </p:txBody>
+      </p:sp>
+    </p:spTree>
+    <p:extLst>
+      <p:ext uri="{BB962C8B-B14F-4D97-AF65-F5344CB8AC3E}">
+        <p14:creationId xmlns:p14="http://schemas.microsoft.com/office/powerpoint/2010/main" val="2806323913"/>
+      </p:ext>
+    </p:extLst>
+  </p:cSld>
+  <p:clrMapOvr>
+    <a:masterClrMapping/>
+  </p:clrMapOvr>
+</p:sld>
+</file>
+
+<file path=ppt/slides/slide12.xml><?xml version="1.0" encoding="utf-8"?>
+<p:sld xmlns:a="http://schemas.openxmlformats.org/drawingml/2006/main" xmlns:r="http://schemas.openxmlformats.org/officeDocument/2006/relationships" xmlns:p="http://schemas.openxmlformats.org/presentationml/2006/main">
+  <p:cSld>
+    <p:spTree>
+      <p:nvGrpSpPr>
+        <p:cNvPr id="1" name="">
+          <a:extLst>
+            <a:ext uri="{FF2B5EF4-FFF2-40B4-BE49-F238E27FC236}">
+              <a16:creationId xmlns:a16="http://schemas.microsoft.com/office/drawing/2014/main" id="{62B70F2A-C3FE-471F-6691-1431F7B0373A}"/>
+            </a:ext>
+          </a:extLst>
+        </p:cNvPr>
+        <p:cNvGrpSpPr/>
+        <p:nvPr/>
+      </p:nvGrpSpPr>
+      <p:grpSpPr>
+        <a:xfrm>
+          <a:off x="0" y="0"/>
+          <a:ext cx="0" cy="0"/>
+          <a:chOff x="0" y="0"/>
+          <a:chExt cx="0" cy="0"/>
+        </a:xfrm>
+      </p:grpSpPr>
+      <p:sp>
+        <p:nvSpPr>
+          <p:cNvPr id="2" name="Title 1">
+            <a:extLst>
+              <a:ext uri="{FF2B5EF4-FFF2-40B4-BE49-F238E27FC236}">
+                <a16:creationId xmlns:a16="http://schemas.microsoft.com/office/drawing/2014/main" id="{500B7070-A0DC-4C5B-3FD9-CCFF8DECB0B1}"/>
+              </a:ext>
+            </a:extLst>
+          </p:cNvPr>
+          <p:cNvSpPr>
+            <a:spLocks noGrp="1"/>
+          </p:cNvSpPr>
+          <p:nvPr>
+            <p:ph type="title"/>
+          </p:nvPr>
+        </p:nvSpPr>
+        <p:spPr/>
+        <p:txBody>
+          <a:bodyPr/>
+          <a:lstStyle/>
+          <a:p>
+            <a:r>
+              <a:rPr lang="en-US" dirty="0"/>
+              <a:t>1991: Top 10 Movies</a:t>
+            </a:r>
+          </a:p>
+        </p:txBody>
+      </p:sp>
+      <p:graphicFrame>
+        <p:nvGraphicFramePr>
+          <p:cNvPr id="4" name="Content Placeholder 3">
+            <a:extLst>
+              <a:ext uri="{FF2B5EF4-FFF2-40B4-BE49-F238E27FC236}">
+                <a16:creationId xmlns:a16="http://schemas.microsoft.com/office/drawing/2014/main" id="{5FCC852E-F786-F0E4-2F6D-51ADEE2251EA}"/>
+              </a:ext>
+            </a:extLst>
+          </p:cNvPr>
+          <p:cNvGraphicFramePr>
+            <a:graphicFrameLocks noGrp="1"/>
+          </p:cNvGraphicFramePr>
+          <p:nvPr>
+            <p:ph idx="1"/>
+          </p:nvPr>
+        </p:nvGraphicFramePr>
+        <p:xfrm>
+          <a:off x="604520" y="1461294"/>
+          <a:ext cx="7391400" cy="5181600"/>
+        </p:xfrm>
+        <a:graphic>
+          <a:graphicData uri="http://schemas.openxmlformats.org/drawingml/2006/table">
+            <a:tbl>
+              <a:tblPr>
+                <a:tableStyleId>{2D5ABB26-0587-4C30-8999-92F81FD0307C}</a:tableStyleId>
+              </a:tblPr>
+              <a:tblGrid>
+                <a:gridCol w="935530">
+                  <a:extLst>
+                    <a:ext uri="{9D8B030D-6E8A-4147-A177-3AD203B41FA5}">
+                      <a16:colId xmlns:a16="http://schemas.microsoft.com/office/drawing/2014/main" val="290143366"/>
+                    </a:ext>
+                  </a:extLst>
+                </a:gridCol>
+                <a:gridCol w="6455870">
+                  <a:extLst>
+                    <a:ext uri="{9D8B030D-6E8A-4147-A177-3AD203B41FA5}">
+                      <a16:colId xmlns:a16="http://schemas.microsoft.com/office/drawing/2014/main" val="2123079196"/>
+                    </a:ext>
+                  </a:extLst>
+                </a:gridCol>
+              </a:tblGrid>
+              <a:tr h="0">
+                <a:tc>
+                  <a:txBody>
+                    <a:bodyPr/>
+                    <a:lstStyle/>
+                    <a:p>
+                      <a:pPr algn="ctr">
+                        <a:buNone/>
+                      </a:pPr>
+                      <a:r>
+                        <a:rPr lang="en-CA" sz="2800" dirty="0">
+                          <a:effectLst/>
+                        </a:rPr>
+                        <a:t>1</a:t>
+                      </a:r>
+                      <a:endParaRPr lang="en-CA" sz="2800" b="0" i="0" dirty="0">
+                        <a:solidFill>
+                          <a:srgbClr val="202122"/>
+                        </a:solidFill>
+                        <a:effectLst/>
+                        <a:latin typeface="Arial" panose="020B0604020202020204" pitchFamily="34" charset="0"/>
+                      </a:endParaRPr>
+                    </a:p>
+                  </a:txBody>
+                  <a:tcPr anchor="ctr"/>
+                </a:tc>
+                <a:tc>
+                  <a:txBody>
+                    <a:bodyPr/>
+                    <a:lstStyle/>
+                    <a:p>
+                      <a:pPr algn="l">
+                        <a:buNone/>
+                      </a:pPr>
+                      <a:r>
+                        <a:rPr lang="en-CA" sz="2800" dirty="0"/>
+                        <a:t>Terminator 2: Judgment Day</a:t>
+                      </a:r>
+                    </a:p>
+                  </a:txBody>
+                  <a:tcPr anchor="ctr"/>
+                </a:tc>
+                <a:extLst>
+                  <a:ext uri="{0D108BD9-81ED-4DB2-BD59-A6C34878D82A}">
+                    <a16:rowId xmlns:a16="http://schemas.microsoft.com/office/drawing/2014/main" val="2671901504"/>
+                  </a:ext>
+                </a:extLst>
+              </a:tr>
+              <a:tr h="0">
+                <a:tc>
+                  <a:txBody>
+                    <a:bodyPr/>
+                    <a:lstStyle/>
+                    <a:p>
+                      <a:pPr algn="ctr">
+                        <a:buNone/>
+                      </a:pPr>
+                      <a:r>
+                        <a:rPr lang="en-CA" sz="2800" dirty="0">
+                          <a:effectLst/>
+                        </a:rPr>
+                        <a:t>2</a:t>
+                      </a:r>
+                      <a:endParaRPr lang="en-CA" sz="2800" b="0" i="0" dirty="0">
+                        <a:solidFill>
+                          <a:srgbClr val="202122"/>
+                        </a:solidFill>
+                        <a:effectLst/>
+                        <a:latin typeface="Arial" panose="020B0604020202020204" pitchFamily="34" charset="0"/>
+                      </a:endParaRPr>
+                    </a:p>
+                  </a:txBody>
+                  <a:tcPr anchor="ctr"/>
+                </a:tc>
+                <a:tc>
+                  <a:txBody>
+                    <a:bodyPr/>
+                    <a:lstStyle/>
+                    <a:p>
+                      <a:pPr algn="l">
+                        <a:buNone/>
+                      </a:pPr>
+                      <a:r>
+                        <a:rPr lang="en-CA" sz="2800" dirty="0"/>
+                        <a:t>Robin Hood: Prince of Thieves</a:t>
+                      </a:r>
+                    </a:p>
+                  </a:txBody>
+                  <a:tcPr anchor="ctr"/>
+                </a:tc>
+                <a:extLst>
+                  <a:ext uri="{0D108BD9-81ED-4DB2-BD59-A6C34878D82A}">
+                    <a16:rowId xmlns:a16="http://schemas.microsoft.com/office/drawing/2014/main" val="1306705313"/>
+                  </a:ext>
+                </a:extLst>
+              </a:tr>
+              <a:tr h="0">
+                <a:tc>
+                  <a:txBody>
+                    <a:bodyPr/>
+                    <a:lstStyle/>
+                    <a:p>
+                      <a:pPr algn="ctr">
+                        <a:buNone/>
+                      </a:pPr>
+                      <a:r>
+                        <a:rPr lang="en-CA" sz="2800">
+                          <a:effectLst/>
+                        </a:rPr>
+                        <a:t>3</a:t>
+                      </a:r>
+                      <a:endParaRPr lang="en-CA" sz="2800" b="0" i="0">
+                        <a:solidFill>
+                          <a:srgbClr val="202122"/>
+                        </a:solidFill>
+                        <a:effectLst/>
+                        <a:latin typeface="Arial" panose="020B0604020202020204" pitchFamily="34" charset="0"/>
+                      </a:endParaRPr>
+                    </a:p>
+                  </a:txBody>
+                  <a:tcPr anchor="ctr"/>
+                </a:tc>
+                <a:tc>
+                  <a:txBody>
+                    <a:bodyPr/>
+                    <a:lstStyle/>
+                    <a:p>
+                      <a:pPr algn="l">
+                        <a:buNone/>
+                      </a:pPr>
+                      <a:r>
+                        <a:rPr lang="en-CA" sz="2800" dirty="0"/>
+                        <a:t>Beauty and the Beast</a:t>
+                      </a:r>
+                    </a:p>
+                  </a:txBody>
+                  <a:tcPr anchor="ctr"/>
+                </a:tc>
+                <a:extLst>
+                  <a:ext uri="{0D108BD9-81ED-4DB2-BD59-A6C34878D82A}">
+                    <a16:rowId xmlns:a16="http://schemas.microsoft.com/office/drawing/2014/main" val="4240168126"/>
+                  </a:ext>
+                </a:extLst>
+              </a:tr>
+              <a:tr h="0">
+                <a:tc>
+                  <a:txBody>
+                    <a:bodyPr/>
+                    <a:lstStyle/>
+                    <a:p>
+                      <a:pPr algn="ctr">
+                        <a:buNone/>
+                      </a:pPr>
+                      <a:r>
+                        <a:rPr lang="en-CA" sz="2800" dirty="0">
+                          <a:effectLst/>
+                        </a:rPr>
+                        <a:t>4</a:t>
+                      </a:r>
+                      <a:endParaRPr lang="en-CA" sz="2800" b="0" i="0" dirty="0">
+                        <a:solidFill>
+                          <a:srgbClr val="202122"/>
+                        </a:solidFill>
+                        <a:effectLst/>
+                        <a:latin typeface="Arial" panose="020B0604020202020204" pitchFamily="34" charset="0"/>
+                      </a:endParaRPr>
+                    </a:p>
+                  </a:txBody>
+                  <a:tcPr anchor="ctr"/>
+                </a:tc>
+                <a:tc>
+                  <a:txBody>
+                    <a:bodyPr/>
+                    <a:lstStyle/>
+                    <a:p>
+                      <a:pPr algn="l">
+                        <a:buNone/>
+                      </a:pPr>
+                      <a:r>
+                        <a:rPr lang="en-CA" sz="2800" dirty="0"/>
+                        <a:t>Hook</a:t>
+                      </a:r>
+                    </a:p>
+                  </a:txBody>
+                  <a:tcPr anchor="ctr"/>
+                </a:tc>
+                <a:extLst>
+                  <a:ext uri="{0D108BD9-81ED-4DB2-BD59-A6C34878D82A}">
+                    <a16:rowId xmlns:a16="http://schemas.microsoft.com/office/drawing/2014/main" val="3038709859"/>
+                  </a:ext>
+                </a:extLst>
+              </a:tr>
+              <a:tr h="0">
+                <a:tc>
+                  <a:txBody>
+                    <a:bodyPr/>
+                    <a:lstStyle/>
+                    <a:p>
+                      <a:pPr algn="ctr">
+                        <a:buNone/>
+                      </a:pPr>
+                      <a:r>
+                        <a:rPr lang="en-CA" sz="2800">
+                          <a:effectLst/>
+                        </a:rPr>
+                        <a:t>5</a:t>
+                      </a:r>
+                      <a:endParaRPr lang="en-CA" sz="2800" b="0" i="0">
+                        <a:solidFill>
+                          <a:srgbClr val="202122"/>
+                        </a:solidFill>
+                        <a:effectLst/>
+                        <a:latin typeface="Arial" panose="020B0604020202020204" pitchFamily="34" charset="0"/>
+                      </a:endParaRPr>
+                    </a:p>
+                  </a:txBody>
+                  <a:tcPr anchor="ctr"/>
+                </a:tc>
+                <a:tc>
+                  <a:txBody>
+                    <a:bodyPr/>
+                    <a:lstStyle/>
+                    <a:p>
+                      <a:pPr algn="l">
+                        <a:buNone/>
+                      </a:pPr>
+                      <a:r>
+                        <a:rPr lang="en-CA" sz="2800" dirty="0"/>
+                        <a:t>The Silence of the Lambs</a:t>
+                      </a:r>
+                    </a:p>
+                  </a:txBody>
+                  <a:tcPr anchor="ctr"/>
+                </a:tc>
+                <a:extLst>
+                  <a:ext uri="{0D108BD9-81ED-4DB2-BD59-A6C34878D82A}">
+                    <a16:rowId xmlns:a16="http://schemas.microsoft.com/office/drawing/2014/main" val="3379957237"/>
+                  </a:ext>
+                </a:extLst>
+              </a:tr>
+              <a:tr h="0">
+                <a:tc>
+                  <a:txBody>
+                    <a:bodyPr/>
+                    <a:lstStyle/>
+                    <a:p>
+                      <a:pPr algn="ctr">
+                        <a:buNone/>
+                      </a:pPr>
+                      <a:r>
+                        <a:rPr lang="en-CA" sz="2800" dirty="0">
+                          <a:effectLst/>
+                        </a:rPr>
+                        <a:t>6</a:t>
+                      </a:r>
+                      <a:endParaRPr lang="en-CA" sz="2800" b="0" i="0" dirty="0">
+                        <a:solidFill>
+                          <a:srgbClr val="202122"/>
+                        </a:solidFill>
+                        <a:effectLst/>
+                        <a:latin typeface="Arial" panose="020B0604020202020204" pitchFamily="34" charset="0"/>
+                      </a:endParaRPr>
+                    </a:p>
+                  </a:txBody>
+                  <a:tcPr anchor="ctr"/>
+                </a:tc>
+                <a:tc>
+                  <a:txBody>
+                    <a:bodyPr/>
+                    <a:lstStyle/>
+                    <a:p>
+                      <a:pPr algn="l">
+                        <a:buNone/>
+                      </a:pPr>
+                      <a:r>
+                        <a:rPr lang="en-CA" sz="2800" dirty="0"/>
+                        <a:t>JFK</a:t>
+                      </a:r>
+                    </a:p>
+                  </a:txBody>
+                  <a:tcPr anchor="ctr"/>
+                </a:tc>
+                <a:extLst>
+                  <a:ext uri="{0D108BD9-81ED-4DB2-BD59-A6C34878D82A}">
+                    <a16:rowId xmlns:a16="http://schemas.microsoft.com/office/drawing/2014/main" val="1217365440"/>
+                  </a:ext>
+                </a:extLst>
+              </a:tr>
+              <a:tr h="0">
+                <a:tc>
+                  <a:txBody>
+                    <a:bodyPr/>
+                    <a:lstStyle/>
+                    <a:p>
+                      <a:pPr algn="ctr">
+                        <a:buNone/>
+                      </a:pPr>
+                      <a:r>
+                        <a:rPr lang="en-CA" sz="2800" dirty="0">
+                          <a:effectLst/>
+                        </a:rPr>
+                        <a:t>7</a:t>
+                      </a:r>
+                      <a:endParaRPr lang="en-CA" sz="2800" b="0" i="0" dirty="0">
+                        <a:solidFill>
+                          <a:srgbClr val="202122"/>
+                        </a:solidFill>
+                        <a:effectLst/>
+                        <a:latin typeface="Arial" panose="020B0604020202020204" pitchFamily="34" charset="0"/>
+                      </a:endParaRPr>
+                    </a:p>
+                  </a:txBody>
+                  <a:tcPr anchor="ctr"/>
+                </a:tc>
+                <a:tc>
+                  <a:txBody>
+                    <a:bodyPr/>
+                    <a:lstStyle/>
+                    <a:p>
+                      <a:pPr algn="l">
+                        <a:buNone/>
+                      </a:pPr>
+                      <a:r>
+                        <a:rPr lang="en-CA" sz="2800" dirty="0"/>
+                        <a:t>The Naked Gun 2½: The Smell of Fear</a:t>
+                      </a:r>
+                    </a:p>
+                  </a:txBody>
+                  <a:tcPr anchor="ctr"/>
+                </a:tc>
+                <a:extLst>
+                  <a:ext uri="{0D108BD9-81ED-4DB2-BD59-A6C34878D82A}">
+                    <a16:rowId xmlns:a16="http://schemas.microsoft.com/office/drawing/2014/main" val="1973713178"/>
+                  </a:ext>
+                </a:extLst>
+              </a:tr>
+              <a:tr h="0">
+                <a:tc>
+                  <a:txBody>
+                    <a:bodyPr/>
+                    <a:lstStyle/>
+                    <a:p>
+                      <a:pPr algn="ctr">
+                        <a:buNone/>
+                      </a:pPr>
+                      <a:r>
+                        <a:rPr lang="en-CA" sz="2800" dirty="0">
+                          <a:effectLst/>
+                        </a:rPr>
+                        <a:t>8</a:t>
+                      </a:r>
+                      <a:endParaRPr lang="en-CA" sz="2800" b="0" i="0" dirty="0">
+                        <a:solidFill>
+                          <a:srgbClr val="202122"/>
+                        </a:solidFill>
+                        <a:effectLst/>
+                        <a:latin typeface="Arial" panose="020B0604020202020204" pitchFamily="34" charset="0"/>
+                      </a:endParaRPr>
+                    </a:p>
+                  </a:txBody>
+                  <a:tcPr anchor="ctr"/>
+                </a:tc>
+                <a:tc>
+                  <a:txBody>
+                    <a:bodyPr/>
+                    <a:lstStyle/>
+                    <a:p>
+                      <a:pPr algn="l">
+                        <a:buNone/>
+                      </a:pPr>
+                      <a:r>
+                        <a:rPr lang="en-CA" sz="2800" dirty="0"/>
+                        <a:t>The Addams Family</a:t>
+                      </a:r>
+                    </a:p>
+                  </a:txBody>
+                  <a:tcPr anchor="ctr"/>
+                </a:tc>
+                <a:extLst>
+                  <a:ext uri="{0D108BD9-81ED-4DB2-BD59-A6C34878D82A}">
+                    <a16:rowId xmlns:a16="http://schemas.microsoft.com/office/drawing/2014/main" val="127384748"/>
+                  </a:ext>
+                </a:extLst>
+              </a:tr>
+              <a:tr h="0">
+                <a:tc>
+                  <a:txBody>
+                    <a:bodyPr/>
+                    <a:lstStyle/>
+                    <a:p>
+                      <a:pPr algn="ctr">
+                        <a:buNone/>
+                      </a:pPr>
+                      <a:r>
+                        <a:rPr lang="en-CA" sz="2800" dirty="0">
+                          <a:effectLst/>
+                        </a:rPr>
+                        <a:t>9</a:t>
+                      </a:r>
+                      <a:endParaRPr lang="en-CA" sz="2800" b="0" i="0" dirty="0">
+                        <a:solidFill>
+                          <a:srgbClr val="202122"/>
+                        </a:solidFill>
+                        <a:effectLst/>
+                        <a:latin typeface="Arial" panose="020B0604020202020204" pitchFamily="34" charset="0"/>
+                      </a:endParaRPr>
+                    </a:p>
+                  </a:txBody>
+                  <a:tcPr anchor="ctr"/>
+                </a:tc>
+                <a:tc>
+                  <a:txBody>
+                    <a:bodyPr/>
+                    <a:lstStyle/>
+                    <a:p>
+                      <a:pPr algn="l">
+                        <a:buNone/>
+                      </a:pPr>
+                      <a:r>
+                        <a:rPr lang="en-CA" sz="2800" dirty="0"/>
+                        <a:t>Cape Fear</a:t>
+                      </a:r>
+                    </a:p>
+                  </a:txBody>
+                  <a:tcPr anchor="ctr"/>
+                </a:tc>
+                <a:extLst>
+                  <a:ext uri="{0D108BD9-81ED-4DB2-BD59-A6C34878D82A}">
+                    <a16:rowId xmlns:a16="http://schemas.microsoft.com/office/drawing/2014/main" val="379378108"/>
+                  </a:ext>
+                </a:extLst>
+              </a:tr>
+              <a:tr h="0">
+                <a:tc>
+                  <a:txBody>
+                    <a:bodyPr/>
+                    <a:lstStyle/>
+                    <a:p>
+                      <a:pPr algn="ctr">
+                        <a:buNone/>
+                      </a:pPr>
+                      <a:r>
+                        <a:rPr lang="en-CA" sz="2800" dirty="0">
+                          <a:effectLst/>
+                        </a:rPr>
+                        <a:t>10</a:t>
+                      </a:r>
+                      <a:endParaRPr lang="en-CA" sz="2800" b="0" i="0" dirty="0">
+                        <a:solidFill>
+                          <a:srgbClr val="202122"/>
+                        </a:solidFill>
+                        <a:effectLst/>
+                        <a:latin typeface="Arial" panose="020B0604020202020204" pitchFamily="34" charset="0"/>
+                      </a:endParaRPr>
+                    </a:p>
+                  </a:txBody>
+                  <a:tcPr anchor="ctr"/>
+                </a:tc>
+                <a:tc>
+                  <a:txBody>
+                    <a:bodyPr/>
+                    <a:lstStyle/>
+                    <a:p>
+                      <a:pPr algn="l">
+                        <a:buNone/>
+                      </a:pPr>
+                      <a:r>
+                        <a:rPr lang="en-CA" sz="2800" dirty="0"/>
+                        <a:t>Hot Shots!</a:t>
+                      </a:r>
+                    </a:p>
+                  </a:txBody>
+                  <a:tcPr anchor="ctr"/>
+                </a:tc>
+                <a:extLst>
+                  <a:ext uri="{0D108BD9-81ED-4DB2-BD59-A6C34878D82A}">
+                    <a16:rowId xmlns:a16="http://schemas.microsoft.com/office/drawing/2014/main" val="3179537701"/>
+                  </a:ext>
+                </a:extLst>
+              </a:tr>
+            </a:tbl>
+          </a:graphicData>
+        </a:graphic>
+      </p:graphicFrame>
+      <p:pic>
+        <p:nvPicPr>
+          <p:cNvPr id="5" name="Picture 4" descr="A human-like figure wearing sunglasses holds a shotgun while on a motorcycle. The tagline reads &quot;It's nothing personal.&quot; followed by the film's title and credits and rating at the bottom.">
+            <a:extLst>
+              <a:ext uri="{FF2B5EF4-FFF2-40B4-BE49-F238E27FC236}">
+                <a16:creationId xmlns:a16="http://schemas.microsoft.com/office/drawing/2014/main" id="{4A34FCB8-5F5D-F88F-124D-E2AD4EB7A8E9}"/>
+              </a:ext>
+            </a:extLst>
+          </p:cNvPr>
+          <p:cNvPicPr>
+            <a:picLocks noChangeAspect="1"/>
+          </p:cNvPicPr>
+          <p:nvPr/>
+        </p:nvPicPr>
+        <p:blipFill>
+          <a:blip r:embed="rId2"/>
+          <a:stretch>
+            <a:fillRect/>
+          </a:stretch>
+        </p:blipFill>
+        <p:spPr>
+          <a:xfrm>
+            <a:off x="7650480" y="291594"/>
+            <a:ext cx="4338320" cy="6351300"/>
+          </a:xfrm>
+          <a:prstGeom prst="rect">
+            <a:avLst/>
+          </a:prstGeom>
+        </p:spPr>
+      </p:pic>
+    </p:spTree>
+    <p:extLst>
+      <p:ext uri="{BB962C8B-B14F-4D97-AF65-F5344CB8AC3E}">
+        <p14:creationId xmlns:p14="http://schemas.microsoft.com/office/powerpoint/2010/main" val="195079182"/>
+      </p:ext>
+    </p:extLst>
+  </p:cSld>
+  <p:clrMapOvr>
+    <a:masterClrMapping/>
+  </p:clrMapOvr>
+</p:sld>
+</file>
+
+<file path=ppt/slides/slide13.xml><?xml version="1.0" encoding="utf-8"?>
+<p:sld xmlns:a="http://schemas.openxmlformats.org/drawingml/2006/main" xmlns:r="http://schemas.openxmlformats.org/officeDocument/2006/relationships" xmlns:p="http://schemas.openxmlformats.org/presentationml/2006/main">
+  <p:cSld>
+    <p:spTree>
+      <p:nvGrpSpPr>
+        <p:cNvPr id="1" name=""/>
+        <p:cNvGrpSpPr/>
+        <p:nvPr/>
+      </p:nvGrpSpPr>
+      <p:grpSpPr>
+        <a:xfrm>
+          <a:off x="0" y="0"/>
+          <a:ext cx="0" cy="0"/>
+          <a:chOff x="0" y="0"/>
+          <a:chExt cx="0" cy="0"/>
+        </a:xfrm>
+      </p:grpSpPr>
+      <p:sp>
+        <p:nvSpPr>
+          <p:cNvPr id="2" name="Title 1">
+            <a:extLst>
+              <a:ext uri="{FF2B5EF4-FFF2-40B4-BE49-F238E27FC236}">
+                <a16:creationId xmlns:a16="http://schemas.microsoft.com/office/drawing/2014/main" id="{F7A982FB-DB5D-7D21-59BE-002DB7877CE3}"/>
+              </a:ext>
+            </a:extLst>
+          </p:cNvPr>
+          <p:cNvSpPr>
+            <a:spLocks noGrp="1"/>
+          </p:cNvSpPr>
+          <p:nvPr>
+            <p:ph type="title"/>
+          </p:nvPr>
+        </p:nvSpPr>
+        <p:spPr/>
+        <p:txBody>
+          <a:bodyPr/>
+          <a:lstStyle/>
+          <a:p>
+            <a:r>
+              <a:rPr lang="en-US" dirty="0"/>
+              <a:t>1991: Top 10 Songs</a:t>
+            </a:r>
+          </a:p>
+        </p:txBody>
+      </p:sp>
+    </p:spTree>
+    <p:extLst>
+      <p:ext uri="{BB962C8B-B14F-4D97-AF65-F5344CB8AC3E}">
+        <p14:creationId xmlns:p14="http://schemas.microsoft.com/office/powerpoint/2010/main" val="345430048"/>
+      </p:ext>
+    </p:extLst>
+  </p:cSld>
+  <p:clrMapOvr>
+    <a:masterClrMapping/>
+  </p:clrMapOvr>
+</p:sld>
+</file>
+
+<file path=ppt/slides/slide14.xml><?xml version="1.0" encoding="utf-8"?>
+<p:sld xmlns:a="http://schemas.openxmlformats.org/drawingml/2006/main" xmlns:r="http://schemas.openxmlformats.org/officeDocument/2006/relationships" xmlns:p="http://schemas.openxmlformats.org/presentationml/2006/main">
+  <p:cSld>
+    <p:spTree>
+      <p:nvGrpSpPr>
+        <p:cNvPr id="1" name="">
+          <a:extLst>
+            <a:ext uri="{FF2B5EF4-FFF2-40B4-BE49-F238E27FC236}">
               <a16:creationId xmlns:a16="http://schemas.microsoft.com/office/drawing/2014/main" id="{E294E6CA-7286-B338-238F-23B1C1B49C10}"/>
             </a:ext>
           </a:extLst>
@@ -3904,6 +4916,11 @@
           </p:cNvGraphicFramePr>
           <p:nvPr>
             <p:ph idx="1"/>
+            <p:extLst>
+              <p:ext uri="{D42A27DB-BD31-4B8C-83A1-F6EECF244321}">
+                <p14:modId xmlns:p14="http://schemas.microsoft.com/office/powerpoint/2010/main" val="115666128"/>
+              </p:ext>
+            </p:extLst>
           </p:nvPr>
         </p:nvGraphicFramePr>
         <p:xfrm>
@@ -3974,12 +4991,12 @@
                         <a:buNone/>
                       </a:pPr>
                       <a:r>
-                        <a:rPr lang="en-CA" sz="1800" u="sng" dirty="0">
+                        <a:rPr lang="en-CA" sz="1800" u="none" dirty="0">
                           <a:effectLst/>
                         </a:rPr>
                         <a:t>(Everything I Do) I Do It for You</a:t>
                       </a:r>
-                      <a:endParaRPr lang="en-CA" sz="1800" b="0" i="0" dirty="0">
+                      <a:endParaRPr lang="en-CA" sz="1800" b="0" i="0" u="none" dirty="0">
                         <a:solidFill>
                           <a:srgbClr val="202122"/>
                         </a:solidFill>
@@ -4791,8 +5808,8 @@
         </p:blipFill>
         <p:spPr>
           <a:xfrm>
-            <a:off x="8054340" y="1776254"/>
-            <a:ext cx="3175000" cy="3175000"/>
+            <a:off x="7007860" y="1063308"/>
+            <a:ext cx="4941252" cy="4941252"/>
           </a:xfrm>
           <a:prstGeom prst="rect">
             <a:avLst/>
@@ -4812,7 +5829,7 @@
 </p:sld>
 </file>
 
-<file path=ppt/slides/slide11.xml><?xml version="1.0" encoding="utf-8"?>
+<file path=ppt/slides/slide15.xml><?xml version="1.0" encoding="utf-8"?>
 <p:sld xmlns:a="http://schemas.openxmlformats.org/drawingml/2006/main" xmlns:r="http://schemas.openxmlformats.org/officeDocument/2006/relationships" xmlns:p="http://schemas.openxmlformats.org/presentationml/2006/main">
   <p:cSld>
     <p:spTree>
@@ -4870,7 +5887,7 @@
 </p:sld>
 </file>
 
-<file path=ppt/slides/slide12.xml><?xml version="1.0" encoding="utf-8"?>
+<file path=ppt/slides/slide16.xml><?xml version="1.0" encoding="utf-8"?>
 <p:sld xmlns:a="http://schemas.openxmlformats.org/drawingml/2006/main" xmlns:r="http://schemas.openxmlformats.org/officeDocument/2006/relationships" xmlns:p="http://schemas.openxmlformats.org/presentationml/2006/main">
   <p:cSld>
     <p:spTree>
@@ -5226,7 +6243,7 @@
         <p:spPr>
           <a:xfrm>
             <a:off x="8762999" y="1690688"/>
-            <a:ext cx="2902713" cy="4190206"/>
+            <a:ext cx="3248795" cy="4689792"/>
           </a:xfrm>
           <a:prstGeom prst="rect">
             <a:avLst/>
@@ -5246,7 +6263,7 @@
 </p:sld>
 </file>
 
-<file path=ppt/slides/slide13.xml><?xml version="1.0" encoding="utf-8"?>
+<file path=ppt/slides/slide17.xml><?xml version="1.0" encoding="utf-8"?>
 <p:sld xmlns:a="http://schemas.openxmlformats.org/drawingml/2006/main" xmlns:r="http://schemas.openxmlformats.org/officeDocument/2006/relationships" xmlns:p="http://schemas.openxmlformats.org/presentationml/2006/main">
   <p:cSld>
     <p:spTree>
@@ -5291,31 +6308,6 @@
           </a:p>
         </p:txBody>
       </p:sp>
-      <p:sp>
-        <p:nvSpPr>
-          <p:cNvPr id="7" name="Content Placeholder 6">
-            <a:extLst>
-              <a:ext uri="{FF2B5EF4-FFF2-40B4-BE49-F238E27FC236}">
-                <a16:creationId xmlns:a16="http://schemas.microsoft.com/office/drawing/2014/main" id="{DB532FAD-F0E2-2DBF-E82C-FAF0D61C7492}"/>
-              </a:ext>
-            </a:extLst>
-          </p:cNvPr>
-          <p:cNvSpPr>
-            <a:spLocks noGrp="1"/>
-          </p:cNvSpPr>
-          <p:nvPr>
-            <p:ph idx="1"/>
-          </p:nvPr>
-        </p:nvSpPr>
-        <p:spPr/>
-        <p:txBody>
-          <a:bodyPr/>
-          <a:lstStyle/>
-          <a:p>
-            <a:endParaRPr lang="en-US"/>
-          </a:p>
-        </p:txBody>
-      </p:sp>
     </p:spTree>
     <p:extLst>
       <p:ext uri="{BB962C8B-B14F-4D97-AF65-F5344CB8AC3E}">
@@ -5329,7 +6321,7 @@
 </p:sld>
 </file>
 
-<file path=ppt/slides/slide14.xml><?xml version="1.0" encoding="utf-8"?>
+<file path=ppt/slides/slide18.xml><?xml version="1.0" encoding="utf-8"?>
 <p:sld xmlns:a="http://schemas.openxmlformats.org/drawingml/2006/main" xmlns:r="http://schemas.openxmlformats.org/officeDocument/2006/relationships" xmlns:p="http://schemas.openxmlformats.org/presentationml/2006/main">
   <p:cSld>
     <p:spTree>
@@ -6066,7 +7058,7 @@
 </p:sld>
 </file>
 
-<file path=ppt/slides/slide15.xml><?xml version="1.0" encoding="utf-8"?>
+<file path=ppt/slides/slide19.xml><?xml version="1.0" encoding="utf-8"?>
 <p:sld xmlns:a="http://schemas.openxmlformats.org/drawingml/2006/main" xmlns:r="http://schemas.openxmlformats.org/officeDocument/2006/relationships" xmlns:p="http://schemas.openxmlformats.org/presentationml/2006/main">
   <p:cSld>
     <p:spTree>
@@ -6185,7 +7177,137 @@
 </p:sld>
 </file>
 
-<file path=ppt/slides/slide16.xml><?xml version="1.0" encoding="utf-8"?>
+<file path=ppt/slides/slide2.xml><?xml version="1.0" encoding="utf-8"?>
+<p:sld xmlns:a="http://schemas.openxmlformats.org/drawingml/2006/main" xmlns:r="http://schemas.openxmlformats.org/officeDocument/2006/relationships" xmlns:p="http://schemas.openxmlformats.org/presentationml/2006/main">
+  <p:cSld>
+    <p:spTree>
+      <p:nvGrpSpPr>
+        <p:cNvPr id="1" name=""/>
+        <p:cNvGrpSpPr/>
+        <p:nvPr/>
+      </p:nvGrpSpPr>
+      <p:grpSpPr>
+        <a:xfrm>
+          <a:off x="0" y="0"/>
+          <a:ext cx="0" cy="0"/>
+          <a:chOff x="0" y="0"/>
+          <a:chExt cx="0" cy="0"/>
+        </a:xfrm>
+      </p:grpSpPr>
+      <p:sp>
+        <p:nvSpPr>
+          <p:cNvPr id="2" name="Title 1">
+            <a:extLst>
+              <a:ext uri="{FF2B5EF4-FFF2-40B4-BE49-F238E27FC236}">
+                <a16:creationId xmlns:a16="http://schemas.microsoft.com/office/drawing/2014/main" id="{D54736E0-3BA2-3C80-3275-9F819EE0BB0B}"/>
+              </a:ext>
+            </a:extLst>
+          </p:cNvPr>
+          <p:cNvSpPr>
+            <a:spLocks noGrp="1"/>
+          </p:cNvSpPr>
+          <p:nvPr>
+            <p:ph type="title"/>
+          </p:nvPr>
+        </p:nvSpPr>
+        <p:spPr/>
+        <p:txBody>
+          <a:bodyPr/>
+          <a:lstStyle/>
+          <a:p>
+            <a:r>
+              <a:rPr lang="en-US" dirty="0"/>
+              <a:t>Introduction</a:t>
+            </a:r>
+          </a:p>
+        </p:txBody>
+      </p:sp>
+      <p:sp>
+        <p:nvSpPr>
+          <p:cNvPr id="3" name="Content Placeholder 2">
+            <a:extLst>
+              <a:ext uri="{FF2B5EF4-FFF2-40B4-BE49-F238E27FC236}">
+                <a16:creationId xmlns:a16="http://schemas.microsoft.com/office/drawing/2014/main" id="{3D0D92EC-EF6B-87D9-B8C2-4378B9BB5D7B}"/>
+              </a:ext>
+            </a:extLst>
+          </p:cNvPr>
+          <p:cNvSpPr>
+            <a:spLocks noGrp="1"/>
+          </p:cNvSpPr>
+          <p:nvPr>
+            <p:ph idx="1"/>
+          </p:nvPr>
+        </p:nvSpPr>
+        <p:spPr/>
+        <p:txBody>
+          <a:bodyPr>
+            <a:normAutofit/>
+          </a:bodyPr>
+          <a:lstStyle/>
+          <a:p>
+            <a:pPr marL="0" indent="0">
+              <a:buNone/>
+            </a:pPr>
+            <a:r>
+              <a:rPr lang="en-US" dirty="0"/>
+              <a:t>This course compares these programming languages:</a:t>
+            </a:r>
+          </a:p>
+          <a:p>
+            <a:pPr marL="0" indent="0">
+              <a:buNone/>
+            </a:pPr>
+            <a:r>
+              <a:rPr lang="en-US" b="1" dirty="0"/>
+              <a:t>Python</a:t>
+            </a:r>
+          </a:p>
+          <a:p>
+            <a:pPr marL="0" indent="0">
+              <a:buNone/>
+            </a:pPr>
+            <a:endParaRPr lang="en-US" b="1" dirty="0"/>
+          </a:p>
+          <a:p>
+            <a:pPr marL="0" indent="0">
+              <a:buNone/>
+            </a:pPr>
+            <a:r>
+              <a:rPr lang="en-US" b="1" dirty="0"/>
+              <a:t>Racket</a:t>
+            </a:r>
+          </a:p>
+          <a:p>
+            <a:pPr marL="0" indent="0">
+              <a:buNone/>
+            </a:pPr>
+            <a:endParaRPr lang="en-US" b="1" dirty="0"/>
+          </a:p>
+          <a:p>
+            <a:pPr marL="0" indent="0">
+              <a:buNone/>
+            </a:pPr>
+            <a:r>
+              <a:rPr lang="en-US" b="1" dirty="0"/>
+              <a:t>Haskell</a:t>
+            </a:r>
+          </a:p>
+        </p:txBody>
+      </p:sp>
+    </p:spTree>
+    <p:extLst>
+      <p:ext uri="{BB962C8B-B14F-4D97-AF65-F5344CB8AC3E}">
+        <p14:creationId xmlns:p14="http://schemas.microsoft.com/office/powerpoint/2010/main" val="3882066604"/>
+      </p:ext>
+    </p:extLst>
+  </p:cSld>
+  <p:clrMapOvr>
+    <a:masterClrMapping/>
+  </p:clrMapOvr>
+</p:sld>
+</file>
+
+<file path=ppt/slides/slide20.xml><?xml version="1.0" encoding="utf-8"?>
 <p:sld xmlns:a="http://schemas.openxmlformats.org/drawingml/2006/main" xmlns:r="http://schemas.openxmlformats.org/officeDocument/2006/relationships" xmlns:p="http://schemas.openxmlformats.org/presentationml/2006/main">
   <p:cSld>
     <p:spTree>
@@ -6394,7 +7516,7 @@
 </p:sld>
 </file>
 
-<file path=ppt/slides/slide17.xml><?xml version="1.0" encoding="utf-8"?>
+<file path=ppt/slides/slide21.xml><?xml version="1.0" encoding="utf-8"?>
 <p:sld xmlns:a="http://schemas.openxmlformats.org/drawingml/2006/main" xmlns:r="http://schemas.openxmlformats.org/officeDocument/2006/relationships" xmlns:p="http://schemas.openxmlformats.org/presentationml/2006/main">
   <p:cSld>
     <p:spTree>
@@ -6668,7 +7790,7 @@
 </p:sld>
 </file>
 
-<file path=ppt/slides/slide18.xml><?xml version="1.0" encoding="utf-8"?>
+<file path=ppt/slides/slide22.xml><?xml version="1.0" encoding="utf-8"?>
 <p:sld xmlns:a="http://schemas.openxmlformats.org/drawingml/2006/main" xmlns:r="http://schemas.openxmlformats.org/officeDocument/2006/relationships" xmlns:p="http://schemas.openxmlformats.org/presentationml/2006/main">
   <p:cSld>
     <p:spTree>
@@ -6815,7 +7937,7 @@
 </p:sld>
 </file>
 
-<file path=ppt/slides/slide19.xml><?xml version="1.0" encoding="utf-8"?>
+<file path=ppt/slides/slide23.xml><?xml version="1.0" encoding="utf-8"?>
 <p:sld xmlns:a="http://schemas.openxmlformats.org/drawingml/2006/main" xmlns:r="http://schemas.openxmlformats.org/officeDocument/2006/relationships" xmlns:p="http://schemas.openxmlformats.org/presentationml/2006/main">
   <p:cSld>
     <p:spTree>
@@ -7219,146 +8341,7 @@
 </p:sld>
 </file>
 
-<file path=ppt/slides/slide2.xml><?xml version="1.0" encoding="utf-8"?>
-<p:sld xmlns:a="http://schemas.openxmlformats.org/drawingml/2006/main" xmlns:r="http://schemas.openxmlformats.org/officeDocument/2006/relationships" xmlns:p="http://schemas.openxmlformats.org/presentationml/2006/main">
-  <p:cSld>
-    <p:spTree>
-      <p:nvGrpSpPr>
-        <p:cNvPr id="1" name=""/>
-        <p:cNvGrpSpPr/>
-        <p:nvPr/>
-      </p:nvGrpSpPr>
-      <p:grpSpPr>
-        <a:xfrm>
-          <a:off x="0" y="0"/>
-          <a:ext cx="0" cy="0"/>
-          <a:chOff x="0" y="0"/>
-          <a:chExt cx="0" cy="0"/>
-        </a:xfrm>
-      </p:grpSpPr>
-      <p:sp>
-        <p:nvSpPr>
-          <p:cNvPr id="2" name="Title 1">
-            <a:extLst>
-              <a:ext uri="{FF2B5EF4-FFF2-40B4-BE49-F238E27FC236}">
-                <a16:creationId xmlns:a16="http://schemas.microsoft.com/office/drawing/2014/main" id="{D54736E0-3BA2-3C80-3275-9F819EE0BB0B}"/>
-              </a:ext>
-            </a:extLst>
-          </p:cNvPr>
-          <p:cNvSpPr>
-            <a:spLocks noGrp="1"/>
-          </p:cNvSpPr>
-          <p:nvPr>
-            <p:ph type="title"/>
-          </p:nvPr>
-        </p:nvSpPr>
-        <p:spPr/>
-        <p:txBody>
-          <a:bodyPr/>
-          <a:lstStyle/>
-          <a:p>
-            <a:r>
-              <a:rPr lang="en-US" dirty="0"/>
-              <a:t>Introduction</a:t>
-            </a:r>
-          </a:p>
-        </p:txBody>
-      </p:sp>
-      <p:sp>
-        <p:nvSpPr>
-          <p:cNvPr id="3" name="Content Placeholder 2">
-            <a:extLst>
-              <a:ext uri="{FF2B5EF4-FFF2-40B4-BE49-F238E27FC236}">
-                <a16:creationId xmlns:a16="http://schemas.microsoft.com/office/drawing/2014/main" id="{3D0D92EC-EF6B-87D9-B8C2-4378B9BB5D7B}"/>
-              </a:ext>
-            </a:extLst>
-          </p:cNvPr>
-          <p:cNvSpPr>
-            <a:spLocks noGrp="1"/>
-          </p:cNvSpPr>
-          <p:nvPr>
-            <p:ph idx="1"/>
-          </p:nvPr>
-        </p:nvSpPr>
-        <p:spPr/>
-        <p:txBody>
-          <a:bodyPr>
-            <a:normAutofit/>
-          </a:bodyPr>
-          <a:lstStyle/>
-          <a:p>
-            <a:pPr marL="0" indent="0">
-              <a:buNone/>
-            </a:pPr>
-            <a:r>
-              <a:rPr lang="en-US" dirty="0"/>
-              <a:t>This course compares these programming languages:</a:t>
-            </a:r>
-          </a:p>
-          <a:p>
-            <a:pPr marL="0" indent="0">
-              <a:buNone/>
-            </a:pPr>
-            <a:r>
-              <a:rPr lang="en-US" b="1" dirty="0"/>
-              <a:t>Python</a:t>
-            </a:r>
-          </a:p>
-          <a:p>
-            <a:pPr lvl="1"/>
-            <a:r>
-              <a:rPr lang="en-US" dirty="0"/>
-              <a:t>Advanced features of one of the most popular programming languages ever.</a:t>
-            </a:r>
-          </a:p>
-          <a:p>
-            <a:pPr marL="0" indent="0">
-              <a:buNone/>
-            </a:pPr>
-            <a:r>
-              <a:rPr lang="en-US" b="1" dirty="0"/>
-              <a:t>Racket</a:t>
-            </a:r>
-          </a:p>
-          <a:p>
-            <a:pPr lvl="1"/>
-            <a:r>
-              <a:rPr lang="en-US" dirty="0"/>
-              <a:t>A version of LISP, an influential language first created in the 1950s. The programs are lists!</a:t>
-            </a:r>
-          </a:p>
-          <a:p>
-            <a:pPr marL="0" indent="0">
-              <a:buNone/>
-            </a:pPr>
-            <a:r>
-              <a:rPr lang="en-US" b="1" dirty="0"/>
-              <a:t>Haskell</a:t>
-            </a:r>
-          </a:p>
-          <a:p>
-            <a:pPr lvl="1"/>
-            <a:r>
-              <a:rPr lang="en-US" dirty="0"/>
-              <a:t>An elegant language that is similar spirit to LISP, but adds static type checking. Packed with all kind of interesting ideas.</a:t>
-            </a:r>
-          </a:p>
-        </p:txBody>
-      </p:sp>
-    </p:spTree>
-    <p:extLst>
-      <p:ext uri="{BB962C8B-B14F-4D97-AF65-F5344CB8AC3E}">
-        <p14:creationId xmlns:p14="http://schemas.microsoft.com/office/powerpoint/2010/main" val="3882066604"/>
-      </p:ext>
-    </p:extLst>
-  </p:cSld>
-  <p:clrMapOvr>
-    <a:masterClrMapping/>
-  </p:clrMapOvr>
-</p:sld>
-</file>
-
-<file path=ppt/slides/slide20.xml><?xml version="1.0" encoding="utf-8"?>
+<file path=ppt/slides/slide24.xml><?xml version="1.0" encoding="utf-8"?>
 <p:sld xmlns:a="http://schemas.openxmlformats.org/drawingml/2006/main" xmlns:r="http://schemas.openxmlformats.org/officeDocument/2006/relationships" xmlns:p="http://schemas.openxmlformats.org/presentationml/2006/main">
   <p:cSld>
     <p:spTree>
@@ -7584,6 +8567,426 @@
   <p:cSld>
     <p:spTree>
       <p:nvGrpSpPr>
+        <p:cNvPr id="1" name="">
+          <a:extLst>
+            <a:ext uri="{FF2B5EF4-FFF2-40B4-BE49-F238E27FC236}">
+              <a16:creationId xmlns:a16="http://schemas.microsoft.com/office/drawing/2014/main" id="{FD5513B5-61B2-A43B-29CE-9E7B135A4880}"/>
+            </a:ext>
+          </a:extLst>
+        </p:cNvPr>
+        <p:cNvGrpSpPr/>
+        <p:nvPr/>
+      </p:nvGrpSpPr>
+      <p:grpSpPr>
+        <a:xfrm>
+          <a:off x="0" y="0"/>
+          <a:ext cx="0" cy="0"/>
+          <a:chOff x="0" y="0"/>
+          <a:chExt cx="0" cy="0"/>
+        </a:xfrm>
+      </p:grpSpPr>
+      <p:sp>
+        <p:nvSpPr>
+          <p:cNvPr id="2" name="Title 1">
+            <a:extLst>
+              <a:ext uri="{FF2B5EF4-FFF2-40B4-BE49-F238E27FC236}">
+                <a16:creationId xmlns:a16="http://schemas.microsoft.com/office/drawing/2014/main" id="{1BB1CDDB-71CE-EE63-21C4-50A1E5D889C7}"/>
+              </a:ext>
+            </a:extLst>
+          </p:cNvPr>
+          <p:cNvSpPr>
+            <a:spLocks noGrp="1"/>
+          </p:cNvSpPr>
+          <p:nvPr>
+            <p:ph type="title"/>
+          </p:nvPr>
+        </p:nvSpPr>
+        <p:spPr/>
+        <p:txBody>
+          <a:bodyPr/>
+          <a:lstStyle/>
+          <a:p>
+            <a:r>
+              <a:rPr lang="en-US" dirty="0"/>
+              <a:t>Introduction</a:t>
+            </a:r>
+          </a:p>
+        </p:txBody>
+      </p:sp>
+      <p:sp>
+        <p:nvSpPr>
+          <p:cNvPr id="3" name="Content Placeholder 2">
+            <a:extLst>
+              <a:ext uri="{FF2B5EF4-FFF2-40B4-BE49-F238E27FC236}">
+                <a16:creationId xmlns:a16="http://schemas.microsoft.com/office/drawing/2014/main" id="{266387C5-BE2D-B798-55FA-B10E30FF4D01}"/>
+              </a:ext>
+            </a:extLst>
+          </p:cNvPr>
+          <p:cNvSpPr>
+            <a:spLocks noGrp="1"/>
+          </p:cNvSpPr>
+          <p:nvPr>
+            <p:ph idx="1"/>
+          </p:nvPr>
+        </p:nvSpPr>
+        <p:spPr/>
+        <p:txBody>
+          <a:bodyPr>
+            <a:normAutofit/>
+          </a:bodyPr>
+          <a:lstStyle/>
+          <a:p>
+            <a:pPr marL="0" indent="0">
+              <a:buNone/>
+            </a:pPr>
+            <a:r>
+              <a:rPr lang="en-US" dirty="0"/>
+              <a:t>This course compares these programming languages:</a:t>
+            </a:r>
+          </a:p>
+          <a:p>
+            <a:pPr marL="0" indent="0">
+              <a:buNone/>
+            </a:pPr>
+            <a:r>
+              <a:rPr lang="en-US" b="1" dirty="0"/>
+              <a:t>Python</a:t>
+            </a:r>
+          </a:p>
+          <a:p>
+            <a:pPr lvl="1"/>
+            <a:r>
+              <a:rPr lang="en-US" dirty="0"/>
+              <a:t>Advanced features of one of the most popular programming languages ever.</a:t>
+            </a:r>
+          </a:p>
+          <a:p>
+            <a:pPr marL="0" indent="0">
+              <a:buNone/>
+            </a:pPr>
+            <a:r>
+              <a:rPr lang="en-US" b="1" dirty="0"/>
+              <a:t>Racket</a:t>
+            </a:r>
+          </a:p>
+          <a:p>
+            <a:pPr marL="0" indent="0">
+              <a:buNone/>
+            </a:pPr>
+            <a:endParaRPr lang="en-US" b="1" dirty="0"/>
+          </a:p>
+          <a:p>
+            <a:pPr marL="0" indent="0">
+              <a:buNone/>
+            </a:pPr>
+            <a:r>
+              <a:rPr lang="en-US" b="1" dirty="0"/>
+              <a:t>Haskell</a:t>
+            </a:r>
+          </a:p>
+        </p:txBody>
+      </p:sp>
+    </p:spTree>
+    <p:extLst>
+      <p:ext uri="{BB962C8B-B14F-4D97-AF65-F5344CB8AC3E}">
+        <p14:creationId xmlns:p14="http://schemas.microsoft.com/office/powerpoint/2010/main" val="818948213"/>
+      </p:ext>
+    </p:extLst>
+  </p:cSld>
+  <p:clrMapOvr>
+    <a:masterClrMapping/>
+  </p:clrMapOvr>
+</p:sld>
+</file>
+
+<file path=ppt/slides/slide4.xml><?xml version="1.0" encoding="utf-8"?>
+<p:sld xmlns:a="http://schemas.openxmlformats.org/drawingml/2006/main" xmlns:r="http://schemas.openxmlformats.org/officeDocument/2006/relationships" xmlns:p="http://schemas.openxmlformats.org/presentationml/2006/main">
+  <p:cSld>
+    <p:spTree>
+      <p:nvGrpSpPr>
+        <p:cNvPr id="1" name="">
+          <a:extLst>
+            <a:ext uri="{FF2B5EF4-FFF2-40B4-BE49-F238E27FC236}">
+              <a16:creationId xmlns:a16="http://schemas.microsoft.com/office/drawing/2014/main" id="{CB31B961-500C-6B42-0511-5A9CB67A0E5D}"/>
+            </a:ext>
+          </a:extLst>
+        </p:cNvPr>
+        <p:cNvGrpSpPr/>
+        <p:nvPr/>
+      </p:nvGrpSpPr>
+      <p:grpSpPr>
+        <a:xfrm>
+          <a:off x="0" y="0"/>
+          <a:ext cx="0" cy="0"/>
+          <a:chOff x="0" y="0"/>
+          <a:chExt cx="0" cy="0"/>
+        </a:xfrm>
+      </p:grpSpPr>
+      <p:sp>
+        <p:nvSpPr>
+          <p:cNvPr id="2" name="Title 1">
+            <a:extLst>
+              <a:ext uri="{FF2B5EF4-FFF2-40B4-BE49-F238E27FC236}">
+                <a16:creationId xmlns:a16="http://schemas.microsoft.com/office/drawing/2014/main" id="{90E94F40-6E5E-C2B8-182C-74CB55003D3E}"/>
+              </a:ext>
+            </a:extLst>
+          </p:cNvPr>
+          <p:cNvSpPr>
+            <a:spLocks noGrp="1"/>
+          </p:cNvSpPr>
+          <p:nvPr>
+            <p:ph type="title"/>
+          </p:nvPr>
+        </p:nvSpPr>
+        <p:spPr/>
+        <p:txBody>
+          <a:bodyPr/>
+          <a:lstStyle/>
+          <a:p>
+            <a:r>
+              <a:rPr lang="en-US" dirty="0"/>
+              <a:t>Introduction</a:t>
+            </a:r>
+          </a:p>
+        </p:txBody>
+      </p:sp>
+      <p:sp>
+        <p:nvSpPr>
+          <p:cNvPr id="3" name="Content Placeholder 2">
+            <a:extLst>
+              <a:ext uri="{FF2B5EF4-FFF2-40B4-BE49-F238E27FC236}">
+                <a16:creationId xmlns:a16="http://schemas.microsoft.com/office/drawing/2014/main" id="{0EF5B689-9105-7349-C1B4-A0457F81D291}"/>
+              </a:ext>
+            </a:extLst>
+          </p:cNvPr>
+          <p:cNvSpPr>
+            <a:spLocks noGrp="1"/>
+          </p:cNvSpPr>
+          <p:nvPr>
+            <p:ph idx="1"/>
+          </p:nvPr>
+        </p:nvSpPr>
+        <p:spPr/>
+        <p:txBody>
+          <a:bodyPr>
+            <a:normAutofit/>
+          </a:bodyPr>
+          <a:lstStyle/>
+          <a:p>
+            <a:pPr marL="0" indent="0">
+              <a:buNone/>
+            </a:pPr>
+            <a:r>
+              <a:rPr lang="en-US" dirty="0"/>
+              <a:t>This course compares these programming languages:</a:t>
+            </a:r>
+          </a:p>
+          <a:p>
+            <a:pPr marL="0" indent="0">
+              <a:buNone/>
+            </a:pPr>
+            <a:r>
+              <a:rPr lang="en-US" b="1" dirty="0"/>
+              <a:t>Python</a:t>
+            </a:r>
+          </a:p>
+          <a:p>
+            <a:pPr lvl="1"/>
+            <a:r>
+              <a:rPr lang="en-US" dirty="0"/>
+              <a:t>Advanced features of one of the most popular programming languages ever.</a:t>
+            </a:r>
+          </a:p>
+          <a:p>
+            <a:pPr marL="0" indent="0">
+              <a:buNone/>
+            </a:pPr>
+            <a:r>
+              <a:rPr lang="en-US" b="1" dirty="0"/>
+              <a:t>Racket</a:t>
+            </a:r>
+          </a:p>
+          <a:p>
+            <a:pPr lvl="1"/>
+            <a:r>
+              <a:rPr lang="en-US" dirty="0"/>
+              <a:t>A version of LISP, an influential language first created in the 1950s. The programs are lists!</a:t>
+            </a:r>
+          </a:p>
+          <a:p>
+            <a:pPr marL="0" indent="0">
+              <a:buNone/>
+            </a:pPr>
+            <a:r>
+              <a:rPr lang="en-US" b="1" dirty="0"/>
+              <a:t>Haskell</a:t>
+            </a:r>
+          </a:p>
+        </p:txBody>
+      </p:sp>
+    </p:spTree>
+    <p:extLst>
+      <p:ext uri="{BB962C8B-B14F-4D97-AF65-F5344CB8AC3E}">
+        <p14:creationId xmlns:p14="http://schemas.microsoft.com/office/powerpoint/2010/main" val="1089380561"/>
+      </p:ext>
+    </p:extLst>
+  </p:cSld>
+  <p:clrMapOvr>
+    <a:masterClrMapping/>
+  </p:clrMapOvr>
+</p:sld>
+</file>
+
+<file path=ppt/slides/slide5.xml><?xml version="1.0" encoding="utf-8"?>
+<p:sld xmlns:a="http://schemas.openxmlformats.org/drawingml/2006/main" xmlns:r="http://schemas.openxmlformats.org/officeDocument/2006/relationships" xmlns:p="http://schemas.openxmlformats.org/presentationml/2006/main">
+  <p:cSld>
+    <p:spTree>
+      <p:nvGrpSpPr>
+        <p:cNvPr id="1" name="">
+          <a:extLst>
+            <a:ext uri="{FF2B5EF4-FFF2-40B4-BE49-F238E27FC236}">
+              <a16:creationId xmlns:a16="http://schemas.microsoft.com/office/drawing/2014/main" id="{2D7F2DC3-46D0-AC2E-4968-0557ECD603F4}"/>
+            </a:ext>
+          </a:extLst>
+        </p:cNvPr>
+        <p:cNvGrpSpPr/>
+        <p:nvPr/>
+      </p:nvGrpSpPr>
+      <p:grpSpPr>
+        <a:xfrm>
+          <a:off x="0" y="0"/>
+          <a:ext cx="0" cy="0"/>
+          <a:chOff x="0" y="0"/>
+          <a:chExt cx="0" cy="0"/>
+        </a:xfrm>
+      </p:grpSpPr>
+      <p:sp>
+        <p:nvSpPr>
+          <p:cNvPr id="2" name="Title 1">
+            <a:extLst>
+              <a:ext uri="{FF2B5EF4-FFF2-40B4-BE49-F238E27FC236}">
+                <a16:creationId xmlns:a16="http://schemas.microsoft.com/office/drawing/2014/main" id="{67E1C3B9-A057-A08A-5E5D-895D56C93B34}"/>
+              </a:ext>
+            </a:extLst>
+          </p:cNvPr>
+          <p:cNvSpPr>
+            <a:spLocks noGrp="1"/>
+          </p:cNvSpPr>
+          <p:nvPr>
+            <p:ph type="title"/>
+          </p:nvPr>
+        </p:nvSpPr>
+        <p:spPr/>
+        <p:txBody>
+          <a:bodyPr/>
+          <a:lstStyle/>
+          <a:p>
+            <a:r>
+              <a:rPr lang="en-US" dirty="0"/>
+              <a:t>Introduction</a:t>
+            </a:r>
+          </a:p>
+        </p:txBody>
+      </p:sp>
+      <p:sp>
+        <p:nvSpPr>
+          <p:cNvPr id="3" name="Content Placeholder 2">
+            <a:extLst>
+              <a:ext uri="{FF2B5EF4-FFF2-40B4-BE49-F238E27FC236}">
+                <a16:creationId xmlns:a16="http://schemas.microsoft.com/office/drawing/2014/main" id="{E7D1FFAB-44E6-7E7E-C201-4EA5E13A13FB}"/>
+              </a:ext>
+            </a:extLst>
+          </p:cNvPr>
+          <p:cNvSpPr>
+            <a:spLocks noGrp="1"/>
+          </p:cNvSpPr>
+          <p:nvPr>
+            <p:ph idx="1"/>
+          </p:nvPr>
+        </p:nvSpPr>
+        <p:spPr/>
+        <p:txBody>
+          <a:bodyPr>
+            <a:normAutofit/>
+          </a:bodyPr>
+          <a:lstStyle/>
+          <a:p>
+            <a:pPr marL="0" indent="0">
+              <a:buNone/>
+            </a:pPr>
+            <a:r>
+              <a:rPr lang="en-US" dirty="0"/>
+              <a:t>This course compares these programming languages:</a:t>
+            </a:r>
+          </a:p>
+          <a:p>
+            <a:pPr marL="0" indent="0">
+              <a:buNone/>
+            </a:pPr>
+            <a:r>
+              <a:rPr lang="en-US" b="1" dirty="0"/>
+              <a:t>Python</a:t>
+            </a:r>
+          </a:p>
+          <a:p>
+            <a:pPr lvl="1"/>
+            <a:r>
+              <a:rPr lang="en-US" dirty="0"/>
+              <a:t>Advanced features of one of the most popular programming languages ever.</a:t>
+            </a:r>
+          </a:p>
+          <a:p>
+            <a:pPr marL="0" indent="0">
+              <a:buNone/>
+            </a:pPr>
+            <a:r>
+              <a:rPr lang="en-US" b="1" dirty="0"/>
+              <a:t>Racket</a:t>
+            </a:r>
+          </a:p>
+          <a:p>
+            <a:pPr lvl="1"/>
+            <a:r>
+              <a:rPr lang="en-US" dirty="0"/>
+              <a:t>A version of LISP, an influential language first created in the 1950s. The programs are lists!</a:t>
+            </a:r>
+          </a:p>
+          <a:p>
+            <a:pPr marL="0" indent="0">
+              <a:buNone/>
+            </a:pPr>
+            <a:r>
+              <a:rPr lang="en-US" b="1" dirty="0"/>
+              <a:t>Haskell</a:t>
+            </a:r>
+          </a:p>
+          <a:p>
+            <a:pPr lvl="1"/>
+            <a:r>
+              <a:rPr lang="en-US" dirty="0"/>
+              <a:t>An elegant language that is similar spirit to LISP, but adds static type checking. Packed with all kind of interesting ideas.</a:t>
+            </a:r>
+          </a:p>
+        </p:txBody>
+      </p:sp>
+    </p:spTree>
+    <p:extLst>
+      <p:ext uri="{BB962C8B-B14F-4D97-AF65-F5344CB8AC3E}">
+        <p14:creationId xmlns:p14="http://schemas.microsoft.com/office/powerpoint/2010/main" val="1837298015"/>
+      </p:ext>
+    </p:extLst>
+  </p:cSld>
+  <p:clrMapOvr>
+    <a:masterClrMapping/>
+  </p:clrMapOvr>
+</p:sld>
+</file>
+
+<file path=ppt/slides/slide6.xml><?xml version="1.0" encoding="utf-8"?>
+<p:sld xmlns:a="http://schemas.openxmlformats.org/drawingml/2006/main" xmlns:r="http://schemas.openxmlformats.org/officeDocument/2006/relationships" xmlns:p="http://schemas.openxmlformats.org/presentationml/2006/main">
+  <p:cSld>
+    <p:spTree>
+      <p:nvGrpSpPr>
         <p:cNvPr id="1" name=""/>
         <p:cNvGrpSpPr/>
         <p:nvPr/>
@@ -7706,7 +9109,7 @@
 </p:sld>
 </file>
 
-<file path=ppt/slides/slide4.xml><?xml version="1.0" encoding="utf-8"?>
+<file path=ppt/slides/slide7.xml><?xml version="1.0" encoding="utf-8"?>
 <p:sld xmlns:a="http://schemas.openxmlformats.org/drawingml/2006/main" xmlns:r="http://schemas.openxmlformats.org/officeDocument/2006/relationships" xmlns:p="http://schemas.openxmlformats.org/presentationml/2006/main">
   <p:cSld>
     <p:spTree>
@@ -7835,7 +9238,7 @@
 </p:sld>
 </file>
 
-<file path=ppt/slides/slide5.xml><?xml version="1.0" encoding="utf-8"?>
+<file path=ppt/slides/slide8.xml><?xml version="1.0" encoding="utf-8"?>
 <p:sld xmlns:a="http://schemas.openxmlformats.org/drawingml/2006/main" xmlns:r="http://schemas.openxmlformats.org/officeDocument/2006/relationships" xmlns:p="http://schemas.openxmlformats.org/presentationml/2006/main">
   <p:cSld>
     <p:spTree>
@@ -7902,20 +9305,22 @@
           <a:lstStyle/>
           <a:p>
             <a:r>
+              <a:rPr lang="en-US" b="1" dirty="0"/>
+              <a:t>Linux</a:t>
+            </a:r>
+            <a:r>
               <a:rPr lang="en-US" dirty="0"/>
-              <a:t>Linux is probably the easiest way to get install and use all the languages in this course.</a:t>
-            </a:r>
-          </a:p>
-          <a:p>
+              <a:t> is probably the easiest way to get install and use all the languages in this course.</a:t>
+            </a:r>
+          </a:p>
+          <a:p>
+            <a:r>
+              <a:rPr lang="en-US" b="1" dirty="0"/>
+              <a:t>VS Code</a:t>
+            </a:r>
             <a:r>
               <a:rPr lang="en-US" dirty="0"/>
-              <a:t>VS Code (or similar programming editors) have helpful plug-ins for most languages.</a:t>
-            </a:r>
-          </a:p>
-          <a:p>
-            <a:r>
-              <a:rPr lang="en-US" dirty="0"/>
-              <a:t>You may find that AI is less helpful for Racket and Haskell : they are not that common in practice!</a:t>
+              <a:t> has helpful plug-ins for most languages.</a:t>
             </a:r>
           </a:p>
           <a:p>
@@ -7939,7 +9344,7 @@
 </p:sld>
 </file>
 
-<file path=ppt/slides/slide6.xml><?xml version="1.0" encoding="utf-8"?>
+<file path=ppt/slides/slide9.xml><?xml version="1.0" encoding="utf-8"?>
 <p:sld xmlns:a="http://schemas.openxmlformats.org/drawingml/2006/main" xmlns:r="http://schemas.openxmlformats.org/officeDocument/2006/relationships" xmlns:p="http://schemas.openxmlformats.org/presentationml/2006/main">
   <p:cSld>
     <p:spTree>
@@ -8013,7 +9418,7 @@
           <a:p>
             <a:r>
               <a:rPr lang="en-US" dirty="0"/>
-              <a:t>We’ll use regular Python … make sure you use a recent version (e.g. from this year or last year).</a:t>
+              <a:t>We’ll use regular Python … make sure you use a recent version (e.g. from this year).</a:t>
             </a:r>
           </a:p>
           <a:p>
@@ -8034,792 +9439,6 @@
     <p:extLst>
       <p:ext uri="{BB962C8B-B14F-4D97-AF65-F5344CB8AC3E}">
         <p14:creationId xmlns:p14="http://schemas.microsoft.com/office/powerpoint/2010/main" val="1714044195"/>
-      </p:ext>
-    </p:extLst>
-  </p:cSld>
-  <p:clrMapOvr>
-    <a:masterClrMapping/>
-  </p:clrMapOvr>
-</p:sld>
-</file>
-
-<file path=ppt/slides/slide7.xml><?xml version="1.0" encoding="utf-8"?>
-<p:sld xmlns:a="http://schemas.openxmlformats.org/drawingml/2006/main" xmlns:r="http://schemas.openxmlformats.org/officeDocument/2006/relationships" xmlns:p="http://schemas.openxmlformats.org/presentationml/2006/main">
-  <p:cSld>
-    <p:spTree>
-      <p:nvGrpSpPr>
-        <p:cNvPr id="1" name=""/>
-        <p:cNvGrpSpPr/>
-        <p:nvPr/>
-      </p:nvGrpSpPr>
-      <p:grpSpPr>
-        <a:xfrm>
-          <a:off x="0" y="0"/>
-          <a:ext cx="0" cy="0"/>
-          <a:chOff x="0" y="0"/>
-          <a:chExt cx="0" cy="0"/>
-        </a:xfrm>
-      </p:grpSpPr>
-      <p:sp>
-        <p:nvSpPr>
-          <p:cNvPr id="2" name="Title 1">
-            <a:extLst>
-              <a:ext uri="{FF2B5EF4-FFF2-40B4-BE49-F238E27FC236}">
-                <a16:creationId xmlns:a16="http://schemas.microsoft.com/office/drawing/2014/main" id="{85165E68-B099-28EA-8CDC-50BE56681467}"/>
-              </a:ext>
-            </a:extLst>
-          </p:cNvPr>
-          <p:cNvSpPr>
-            <a:spLocks noGrp="1"/>
-          </p:cNvSpPr>
-          <p:nvPr>
-            <p:ph type="title"/>
-          </p:nvPr>
-        </p:nvSpPr>
-        <p:spPr/>
-        <p:txBody>
-          <a:bodyPr/>
-          <a:lstStyle/>
-          <a:p>
-            <a:r>
-              <a:rPr lang="en-US" dirty="0"/>
-              <a:t>1991: Top 10 Movies</a:t>
-            </a:r>
-          </a:p>
-        </p:txBody>
-      </p:sp>
-      <p:sp>
-        <p:nvSpPr>
-          <p:cNvPr id="7" name="Content Placeholder 6">
-            <a:extLst>
-              <a:ext uri="{FF2B5EF4-FFF2-40B4-BE49-F238E27FC236}">
-                <a16:creationId xmlns:a16="http://schemas.microsoft.com/office/drawing/2014/main" id="{247EB9EF-1B24-C927-B6E2-1BE0D1D10DFB}"/>
-              </a:ext>
-            </a:extLst>
-          </p:cNvPr>
-          <p:cNvSpPr>
-            <a:spLocks noGrp="1"/>
-          </p:cNvSpPr>
-          <p:nvPr>
-            <p:ph idx="1"/>
-          </p:nvPr>
-        </p:nvSpPr>
-        <p:spPr/>
-        <p:txBody>
-          <a:bodyPr/>
-          <a:lstStyle/>
-          <a:p>
-            <a:endParaRPr lang="en-US"/>
-          </a:p>
-        </p:txBody>
-      </p:sp>
-    </p:spTree>
-    <p:extLst>
-      <p:ext uri="{BB962C8B-B14F-4D97-AF65-F5344CB8AC3E}">
-        <p14:creationId xmlns:p14="http://schemas.microsoft.com/office/powerpoint/2010/main" val="2806323913"/>
-      </p:ext>
-    </p:extLst>
-  </p:cSld>
-  <p:clrMapOvr>
-    <a:masterClrMapping/>
-  </p:clrMapOvr>
-</p:sld>
-</file>
-
-<file path=ppt/slides/slide8.xml><?xml version="1.0" encoding="utf-8"?>
-<p:sld xmlns:a="http://schemas.openxmlformats.org/drawingml/2006/main" xmlns:r="http://schemas.openxmlformats.org/officeDocument/2006/relationships" xmlns:p="http://schemas.openxmlformats.org/presentationml/2006/main">
-  <p:cSld>
-    <p:spTree>
-      <p:nvGrpSpPr>
-        <p:cNvPr id="1" name="">
-          <a:extLst>
-            <a:ext uri="{FF2B5EF4-FFF2-40B4-BE49-F238E27FC236}">
-              <a16:creationId xmlns:a16="http://schemas.microsoft.com/office/drawing/2014/main" id="{62B70F2A-C3FE-471F-6691-1431F7B0373A}"/>
-            </a:ext>
-          </a:extLst>
-        </p:cNvPr>
-        <p:cNvGrpSpPr/>
-        <p:nvPr/>
-      </p:nvGrpSpPr>
-      <p:grpSpPr>
-        <a:xfrm>
-          <a:off x="0" y="0"/>
-          <a:ext cx="0" cy="0"/>
-          <a:chOff x="0" y="0"/>
-          <a:chExt cx="0" cy="0"/>
-        </a:xfrm>
-      </p:grpSpPr>
-      <p:sp>
-        <p:nvSpPr>
-          <p:cNvPr id="2" name="Title 1">
-            <a:extLst>
-              <a:ext uri="{FF2B5EF4-FFF2-40B4-BE49-F238E27FC236}">
-                <a16:creationId xmlns:a16="http://schemas.microsoft.com/office/drawing/2014/main" id="{500B7070-A0DC-4C5B-3FD9-CCFF8DECB0B1}"/>
-              </a:ext>
-            </a:extLst>
-          </p:cNvPr>
-          <p:cNvSpPr>
-            <a:spLocks noGrp="1"/>
-          </p:cNvSpPr>
-          <p:nvPr>
-            <p:ph type="title"/>
-          </p:nvPr>
-        </p:nvSpPr>
-        <p:spPr/>
-        <p:txBody>
-          <a:bodyPr/>
-          <a:lstStyle/>
-          <a:p>
-            <a:r>
-              <a:rPr lang="en-US" dirty="0"/>
-              <a:t>1991: Top 10 Movies</a:t>
-            </a:r>
-          </a:p>
-        </p:txBody>
-      </p:sp>
-      <p:graphicFrame>
-        <p:nvGraphicFramePr>
-          <p:cNvPr id="4" name="Content Placeholder 3">
-            <a:extLst>
-              <a:ext uri="{FF2B5EF4-FFF2-40B4-BE49-F238E27FC236}">
-                <a16:creationId xmlns:a16="http://schemas.microsoft.com/office/drawing/2014/main" id="{5FCC852E-F786-F0E4-2F6D-51ADEE2251EA}"/>
-              </a:ext>
-            </a:extLst>
-          </p:cNvPr>
-          <p:cNvGraphicFramePr>
-            <a:graphicFrameLocks noGrp="1"/>
-          </p:cNvGraphicFramePr>
-          <p:nvPr>
-            <p:ph idx="1"/>
-          </p:nvPr>
-        </p:nvGraphicFramePr>
-        <p:xfrm>
-          <a:off x="604520" y="1461294"/>
-          <a:ext cx="7391400" cy="5181600"/>
-        </p:xfrm>
-        <a:graphic>
-          <a:graphicData uri="http://schemas.openxmlformats.org/drawingml/2006/table">
-            <a:tbl>
-              <a:tblPr>
-                <a:tableStyleId>{2D5ABB26-0587-4C30-8999-92F81FD0307C}</a:tableStyleId>
-              </a:tblPr>
-              <a:tblGrid>
-                <a:gridCol w="935530">
-                  <a:extLst>
-                    <a:ext uri="{9D8B030D-6E8A-4147-A177-3AD203B41FA5}">
-                      <a16:colId xmlns:a16="http://schemas.microsoft.com/office/drawing/2014/main" val="290143366"/>
-                    </a:ext>
-                  </a:extLst>
-                </a:gridCol>
-                <a:gridCol w="6455870">
-                  <a:extLst>
-                    <a:ext uri="{9D8B030D-6E8A-4147-A177-3AD203B41FA5}">
-                      <a16:colId xmlns:a16="http://schemas.microsoft.com/office/drawing/2014/main" val="2123079196"/>
-                    </a:ext>
-                  </a:extLst>
-                </a:gridCol>
-              </a:tblGrid>
-              <a:tr h="0">
-                <a:tc>
-                  <a:txBody>
-                    <a:bodyPr/>
-                    <a:lstStyle/>
-                    <a:p>
-                      <a:pPr algn="ctr">
-                        <a:buNone/>
-                      </a:pPr>
-                      <a:r>
-                        <a:rPr lang="en-CA" sz="2800" dirty="0">
-                          <a:effectLst/>
-                        </a:rPr>
-                        <a:t>1</a:t>
-                      </a:r>
-                      <a:endParaRPr lang="en-CA" sz="2800" b="0" i="0" dirty="0">
-                        <a:solidFill>
-                          <a:srgbClr val="202122"/>
-                        </a:solidFill>
-                        <a:effectLst/>
-                        <a:latin typeface="Arial" panose="020B0604020202020204" pitchFamily="34" charset="0"/>
-                      </a:endParaRPr>
-                    </a:p>
-                  </a:txBody>
-                  <a:tcPr anchor="ctr"/>
-                </a:tc>
-                <a:tc>
-                  <a:txBody>
-                    <a:bodyPr/>
-                    <a:lstStyle/>
-                    <a:p>
-                      <a:pPr algn="l">
-                        <a:buNone/>
-                      </a:pPr>
-                      <a:r>
-                        <a:rPr lang="en-CA" sz="2800" dirty="0"/>
-                        <a:t>Terminator 2: Judgment Day</a:t>
-                      </a:r>
-                    </a:p>
-                  </a:txBody>
-                  <a:tcPr anchor="ctr"/>
-                </a:tc>
-                <a:extLst>
-                  <a:ext uri="{0D108BD9-81ED-4DB2-BD59-A6C34878D82A}">
-                    <a16:rowId xmlns:a16="http://schemas.microsoft.com/office/drawing/2014/main" val="2671901504"/>
-                  </a:ext>
-                </a:extLst>
-              </a:tr>
-              <a:tr h="0">
-                <a:tc>
-                  <a:txBody>
-                    <a:bodyPr/>
-                    <a:lstStyle/>
-                    <a:p>
-                      <a:pPr algn="ctr">
-                        <a:buNone/>
-                      </a:pPr>
-                      <a:r>
-                        <a:rPr lang="en-CA" sz="2800" dirty="0">
-                          <a:effectLst/>
-                        </a:rPr>
-                        <a:t>2</a:t>
-                      </a:r>
-                      <a:endParaRPr lang="en-CA" sz="2800" b="0" i="0" dirty="0">
-                        <a:solidFill>
-                          <a:srgbClr val="202122"/>
-                        </a:solidFill>
-                        <a:effectLst/>
-                        <a:latin typeface="Arial" panose="020B0604020202020204" pitchFamily="34" charset="0"/>
-                      </a:endParaRPr>
-                    </a:p>
-                  </a:txBody>
-                  <a:tcPr anchor="ctr"/>
-                </a:tc>
-                <a:tc>
-                  <a:txBody>
-                    <a:bodyPr/>
-                    <a:lstStyle/>
-                    <a:p>
-                      <a:pPr algn="l">
-                        <a:buNone/>
-                      </a:pPr>
-                      <a:r>
-                        <a:rPr lang="en-CA" sz="2800" dirty="0"/>
-                        <a:t>Robin Hood: Prince of Thieves</a:t>
-                      </a:r>
-                    </a:p>
-                  </a:txBody>
-                  <a:tcPr anchor="ctr"/>
-                </a:tc>
-                <a:extLst>
-                  <a:ext uri="{0D108BD9-81ED-4DB2-BD59-A6C34878D82A}">
-                    <a16:rowId xmlns:a16="http://schemas.microsoft.com/office/drawing/2014/main" val="1306705313"/>
-                  </a:ext>
-                </a:extLst>
-              </a:tr>
-              <a:tr h="0">
-                <a:tc>
-                  <a:txBody>
-                    <a:bodyPr/>
-                    <a:lstStyle/>
-                    <a:p>
-                      <a:pPr algn="ctr">
-                        <a:buNone/>
-                      </a:pPr>
-                      <a:r>
-                        <a:rPr lang="en-CA" sz="2800">
-                          <a:effectLst/>
-                        </a:rPr>
-                        <a:t>3</a:t>
-                      </a:r>
-                      <a:endParaRPr lang="en-CA" sz="2800" b="0" i="0">
-                        <a:solidFill>
-                          <a:srgbClr val="202122"/>
-                        </a:solidFill>
-                        <a:effectLst/>
-                        <a:latin typeface="Arial" panose="020B0604020202020204" pitchFamily="34" charset="0"/>
-                      </a:endParaRPr>
-                    </a:p>
-                  </a:txBody>
-                  <a:tcPr anchor="ctr"/>
-                </a:tc>
-                <a:tc>
-                  <a:txBody>
-                    <a:bodyPr/>
-                    <a:lstStyle/>
-                    <a:p>
-                      <a:pPr algn="l">
-                        <a:buNone/>
-                      </a:pPr>
-                      <a:r>
-                        <a:rPr lang="en-CA" sz="2800" dirty="0"/>
-                        <a:t>Beauty and the Beast</a:t>
-                      </a:r>
-                    </a:p>
-                  </a:txBody>
-                  <a:tcPr anchor="ctr"/>
-                </a:tc>
-                <a:extLst>
-                  <a:ext uri="{0D108BD9-81ED-4DB2-BD59-A6C34878D82A}">
-                    <a16:rowId xmlns:a16="http://schemas.microsoft.com/office/drawing/2014/main" val="4240168126"/>
-                  </a:ext>
-                </a:extLst>
-              </a:tr>
-              <a:tr h="0">
-                <a:tc>
-                  <a:txBody>
-                    <a:bodyPr/>
-                    <a:lstStyle/>
-                    <a:p>
-                      <a:pPr algn="ctr">
-                        <a:buNone/>
-                      </a:pPr>
-                      <a:r>
-                        <a:rPr lang="en-CA" sz="2800" dirty="0">
-                          <a:effectLst/>
-                        </a:rPr>
-                        <a:t>4</a:t>
-                      </a:r>
-                      <a:endParaRPr lang="en-CA" sz="2800" b="0" i="0" dirty="0">
-                        <a:solidFill>
-                          <a:srgbClr val="202122"/>
-                        </a:solidFill>
-                        <a:effectLst/>
-                        <a:latin typeface="Arial" panose="020B0604020202020204" pitchFamily="34" charset="0"/>
-                      </a:endParaRPr>
-                    </a:p>
-                  </a:txBody>
-                  <a:tcPr anchor="ctr"/>
-                </a:tc>
-                <a:tc>
-                  <a:txBody>
-                    <a:bodyPr/>
-                    <a:lstStyle/>
-                    <a:p>
-                      <a:pPr algn="l">
-                        <a:buNone/>
-                      </a:pPr>
-                      <a:r>
-                        <a:rPr lang="en-CA" sz="2800" dirty="0"/>
-                        <a:t>Hook</a:t>
-                      </a:r>
-                    </a:p>
-                  </a:txBody>
-                  <a:tcPr anchor="ctr"/>
-                </a:tc>
-                <a:extLst>
-                  <a:ext uri="{0D108BD9-81ED-4DB2-BD59-A6C34878D82A}">
-                    <a16:rowId xmlns:a16="http://schemas.microsoft.com/office/drawing/2014/main" val="3038709859"/>
-                  </a:ext>
-                </a:extLst>
-              </a:tr>
-              <a:tr h="0">
-                <a:tc>
-                  <a:txBody>
-                    <a:bodyPr/>
-                    <a:lstStyle/>
-                    <a:p>
-                      <a:pPr algn="ctr">
-                        <a:buNone/>
-                      </a:pPr>
-                      <a:r>
-                        <a:rPr lang="en-CA" sz="2800">
-                          <a:effectLst/>
-                        </a:rPr>
-                        <a:t>5</a:t>
-                      </a:r>
-                      <a:endParaRPr lang="en-CA" sz="2800" b="0" i="0">
-                        <a:solidFill>
-                          <a:srgbClr val="202122"/>
-                        </a:solidFill>
-                        <a:effectLst/>
-                        <a:latin typeface="Arial" panose="020B0604020202020204" pitchFamily="34" charset="0"/>
-                      </a:endParaRPr>
-                    </a:p>
-                  </a:txBody>
-                  <a:tcPr anchor="ctr"/>
-                </a:tc>
-                <a:tc>
-                  <a:txBody>
-                    <a:bodyPr/>
-                    <a:lstStyle/>
-                    <a:p>
-                      <a:pPr algn="l">
-                        <a:buNone/>
-                      </a:pPr>
-                      <a:r>
-                        <a:rPr lang="en-CA" sz="2800" dirty="0"/>
-                        <a:t>The Silence of the Lambs</a:t>
-                      </a:r>
-                    </a:p>
-                  </a:txBody>
-                  <a:tcPr anchor="ctr"/>
-                </a:tc>
-                <a:extLst>
-                  <a:ext uri="{0D108BD9-81ED-4DB2-BD59-A6C34878D82A}">
-                    <a16:rowId xmlns:a16="http://schemas.microsoft.com/office/drawing/2014/main" val="3379957237"/>
-                  </a:ext>
-                </a:extLst>
-              </a:tr>
-              <a:tr h="0">
-                <a:tc>
-                  <a:txBody>
-                    <a:bodyPr/>
-                    <a:lstStyle/>
-                    <a:p>
-                      <a:pPr algn="ctr">
-                        <a:buNone/>
-                      </a:pPr>
-                      <a:r>
-                        <a:rPr lang="en-CA" sz="2800" dirty="0">
-                          <a:effectLst/>
-                        </a:rPr>
-                        <a:t>6</a:t>
-                      </a:r>
-                      <a:endParaRPr lang="en-CA" sz="2800" b="0" i="0" dirty="0">
-                        <a:solidFill>
-                          <a:srgbClr val="202122"/>
-                        </a:solidFill>
-                        <a:effectLst/>
-                        <a:latin typeface="Arial" panose="020B0604020202020204" pitchFamily="34" charset="0"/>
-                      </a:endParaRPr>
-                    </a:p>
-                  </a:txBody>
-                  <a:tcPr anchor="ctr"/>
-                </a:tc>
-                <a:tc>
-                  <a:txBody>
-                    <a:bodyPr/>
-                    <a:lstStyle/>
-                    <a:p>
-                      <a:pPr algn="l">
-                        <a:buNone/>
-                      </a:pPr>
-                      <a:r>
-                        <a:rPr lang="en-CA" sz="2800" dirty="0"/>
-                        <a:t>JFK</a:t>
-                      </a:r>
-                    </a:p>
-                  </a:txBody>
-                  <a:tcPr anchor="ctr"/>
-                </a:tc>
-                <a:extLst>
-                  <a:ext uri="{0D108BD9-81ED-4DB2-BD59-A6C34878D82A}">
-                    <a16:rowId xmlns:a16="http://schemas.microsoft.com/office/drawing/2014/main" val="1217365440"/>
-                  </a:ext>
-                </a:extLst>
-              </a:tr>
-              <a:tr h="0">
-                <a:tc>
-                  <a:txBody>
-                    <a:bodyPr/>
-                    <a:lstStyle/>
-                    <a:p>
-                      <a:pPr algn="ctr">
-                        <a:buNone/>
-                      </a:pPr>
-                      <a:r>
-                        <a:rPr lang="en-CA" sz="2800" dirty="0">
-                          <a:effectLst/>
-                        </a:rPr>
-                        <a:t>7</a:t>
-                      </a:r>
-                      <a:endParaRPr lang="en-CA" sz="2800" b="0" i="0" dirty="0">
-                        <a:solidFill>
-                          <a:srgbClr val="202122"/>
-                        </a:solidFill>
-                        <a:effectLst/>
-                        <a:latin typeface="Arial" panose="020B0604020202020204" pitchFamily="34" charset="0"/>
-                      </a:endParaRPr>
-                    </a:p>
-                  </a:txBody>
-                  <a:tcPr anchor="ctr"/>
-                </a:tc>
-                <a:tc>
-                  <a:txBody>
-                    <a:bodyPr/>
-                    <a:lstStyle/>
-                    <a:p>
-                      <a:pPr algn="l">
-                        <a:buNone/>
-                      </a:pPr>
-                      <a:r>
-                        <a:rPr lang="en-CA" sz="2800" dirty="0"/>
-                        <a:t>The Naked Gun 2½: The Smell of Fear</a:t>
-                      </a:r>
-                    </a:p>
-                  </a:txBody>
-                  <a:tcPr anchor="ctr"/>
-                </a:tc>
-                <a:extLst>
-                  <a:ext uri="{0D108BD9-81ED-4DB2-BD59-A6C34878D82A}">
-                    <a16:rowId xmlns:a16="http://schemas.microsoft.com/office/drawing/2014/main" val="1973713178"/>
-                  </a:ext>
-                </a:extLst>
-              </a:tr>
-              <a:tr h="0">
-                <a:tc>
-                  <a:txBody>
-                    <a:bodyPr/>
-                    <a:lstStyle/>
-                    <a:p>
-                      <a:pPr algn="ctr">
-                        <a:buNone/>
-                      </a:pPr>
-                      <a:r>
-                        <a:rPr lang="en-CA" sz="2800" dirty="0">
-                          <a:effectLst/>
-                        </a:rPr>
-                        <a:t>8</a:t>
-                      </a:r>
-                      <a:endParaRPr lang="en-CA" sz="2800" b="0" i="0" dirty="0">
-                        <a:solidFill>
-                          <a:srgbClr val="202122"/>
-                        </a:solidFill>
-                        <a:effectLst/>
-                        <a:latin typeface="Arial" panose="020B0604020202020204" pitchFamily="34" charset="0"/>
-                      </a:endParaRPr>
-                    </a:p>
-                  </a:txBody>
-                  <a:tcPr anchor="ctr"/>
-                </a:tc>
-                <a:tc>
-                  <a:txBody>
-                    <a:bodyPr/>
-                    <a:lstStyle/>
-                    <a:p>
-                      <a:pPr algn="l">
-                        <a:buNone/>
-                      </a:pPr>
-                      <a:r>
-                        <a:rPr lang="en-CA" sz="2800" dirty="0"/>
-                        <a:t>The Addams Family</a:t>
-                      </a:r>
-                    </a:p>
-                  </a:txBody>
-                  <a:tcPr anchor="ctr"/>
-                </a:tc>
-                <a:extLst>
-                  <a:ext uri="{0D108BD9-81ED-4DB2-BD59-A6C34878D82A}">
-                    <a16:rowId xmlns:a16="http://schemas.microsoft.com/office/drawing/2014/main" val="127384748"/>
-                  </a:ext>
-                </a:extLst>
-              </a:tr>
-              <a:tr h="0">
-                <a:tc>
-                  <a:txBody>
-                    <a:bodyPr/>
-                    <a:lstStyle/>
-                    <a:p>
-                      <a:pPr algn="ctr">
-                        <a:buNone/>
-                      </a:pPr>
-                      <a:r>
-                        <a:rPr lang="en-CA" sz="2800" dirty="0">
-                          <a:effectLst/>
-                        </a:rPr>
-                        <a:t>9</a:t>
-                      </a:r>
-                      <a:endParaRPr lang="en-CA" sz="2800" b="0" i="0" dirty="0">
-                        <a:solidFill>
-                          <a:srgbClr val="202122"/>
-                        </a:solidFill>
-                        <a:effectLst/>
-                        <a:latin typeface="Arial" panose="020B0604020202020204" pitchFamily="34" charset="0"/>
-                      </a:endParaRPr>
-                    </a:p>
-                  </a:txBody>
-                  <a:tcPr anchor="ctr"/>
-                </a:tc>
-                <a:tc>
-                  <a:txBody>
-                    <a:bodyPr/>
-                    <a:lstStyle/>
-                    <a:p>
-                      <a:pPr algn="l">
-                        <a:buNone/>
-                      </a:pPr>
-                      <a:r>
-                        <a:rPr lang="en-CA" sz="2800" dirty="0"/>
-                        <a:t>Cape Fear</a:t>
-                      </a:r>
-                    </a:p>
-                  </a:txBody>
-                  <a:tcPr anchor="ctr"/>
-                </a:tc>
-                <a:extLst>
-                  <a:ext uri="{0D108BD9-81ED-4DB2-BD59-A6C34878D82A}">
-                    <a16:rowId xmlns:a16="http://schemas.microsoft.com/office/drawing/2014/main" val="379378108"/>
-                  </a:ext>
-                </a:extLst>
-              </a:tr>
-              <a:tr h="0">
-                <a:tc>
-                  <a:txBody>
-                    <a:bodyPr/>
-                    <a:lstStyle/>
-                    <a:p>
-                      <a:pPr algn="ctr">
-                        <a:buNone/>
-                      </a:pPr>
-                      <a:r>
-                        <a:rPr lang="en-CA" sz="2800" dirty="0">
-                          <a:effectLst/>
-                        </a:rPr>
-                        <a:t>10</a:t>
-                      </a:r>
-                      <a:endParaRPr lang="en-CA" sz="2800" b="0" i="0" dirty="0">
-                        <a:solidFill>
-                          <a:srgbClr val="202122"/>
-                        </a:solidFill>
-                        <a:effectLst/>
-                        <a:latin typeface="Arial" panose="020B0604020202020204" pitchFamily="34" charset="0"/>
-                      </a:endParaRPr>
-                    </a:p>
-                  </a:txBody>
-                  <a:tcPr anchor="ctr"/>
-                </a:tc>
-                <a:tc>
-                  <a:txBody>
-                    <a:bodyPr/>
-                    <a:lstStyle/>
-                    <a:p>
-                      <a:pPr algn="l">
-                        <a:buNone/>
-                      </a:pPr>
-                      <a:r>
-                        <a:rPr lang="en-CA" sz="2800" dirty="0"/>
-                        <a:t>Hot Shots!</a:t>
-                      </a:r>
-                    </a:p>
-                  </a:txBody>
-                  <a:tcPr anchor="ctr"/>
-                </a:tc>
-                <a:extLst>
-                  <a:ext uri="{0D108BD9-81ED-4DB2-BD59-A6C34878D82A}">
-                    <a16:rowId xmlns:a16="http://schemas.microsoft.com/office/drawing/2014/main" val="3179537701"/>
-                  </a:ext>
-                </a:extLst>
-              </a:tr>
-            </a:tbl>
-          </a:graphicData>
-        </a:graphic>
-      </p:graphicFrame>
-      <p:pic>
-        <p:nvPicPr>
-          <p:cNvPr id="5" name="Picture 4" descr="A human-like figure wearing sunglasses holds a shotgun while on a motorcycle. The tagline reads &quot;It's nothing personal.&quot; followed by the film's title and credits and rating at the bottom.">
-            <a:extLst>
-              <a:ext uri="{FF2B5EF4-FFF2-40B4-BE49-F238E27FC236}">
-                <a16:creationId xmlns:a16="http://schemas.microsoft.com/office/drawing/2014/main" id="{4A34FCB8-5F5D-F88F-124D-E2AD4EB7A8E9}"/>
-              </a:ext>
-            </a:extLst>
-          </p:cNvPr>
-          <p:cNvPicPr>
-            <a:picLocks noChangeAspect="1"/>
-          </p:cNvPicPr>
-          <p:nvPr/>
-        </p:nvPicPr>
-        <p:blipFill>
-          <a:blip r:embed="rId2"/>
-          <a:stretch>
-            <a:fillRect/>
-          </a:stretch>
-        </p:blipFill>
-        <p:spPr>
-          <a:xfrm>
-            <a:off x="8178800" y="1297940"/>
-            <a:ext cx="3175000" cy="4648200"/>
-          </a:xfrm>
-          <a:prstGeom prst="rect">
-            <a:avLst/>
-          </a:prstGeom>
-        </p:spPr>
-      </p:pic>
-    </p:spTree>
-    <p:extLst>
-      <p:ext uri="{BB962C8B-B14F-4D97-AF65-F5344CB8AC3E}">
-        <p14:creationId xmlns:p14="http://schemas.microsoft.com/office/powerpoint/2010/main" val="195079182"/>
-      </p:ext>
-    </p:extLst>
-  </p:cSld>
-  <p:clrMapOvr>
-    <a:masterClrMapping/>
-  </p:clrMapOvr>
-</p:sld>
-</file>
-
-<file path=ppt/slides/slide9.xml><?xml version="1.0" encoding="utf-8"?>
-<p:sld xmlns:a="http://schemas.openxmlformats.org/drawingml/2006/main" xmlns:r="http://schemas.openxmlformats.org/officeDocument/2006/relationships" xmlns:p="http://schemas.openxmlformats.org/presentationml/2006/main">
-  <p:cSld>
-    <p:spTree>
-      <p:nvGrpSpPr>
-        <p:cNvPr id="1" name=""/>
-        <p:cNvGrpSpPr/>
-        <p:nvPr/>
-      </p:nvGrpSpPr>
-      <p:grpSpPr>
-        <a:xfrm>
-          <a:off x="0" y="0"/>
-          <a:ext cx="0" cy="0"/>
-          <a:chOff x="0" y="0"/>
-          <a:chExt cx="0" cy="0"/>
-        </a:xfrm>
-      </p:grpSpPr>
-      <p:sp>
-        <p:nvSpPr>
-          <p:cNvPr id="2" name="Title 1">
-            <a:extLst>
-              <a:ext uri="{FF2B5EF4-FFF2-40B4-BE49-F238E27FC236}">
-                <a16:creationId xmlns:a16="http://schemas.microsoft.com/office/drawing/2014/main" id="{F7A982FB-DB5D-7D21-59BE-002DB7877CE3}"/>
-              </a:ext>
-            </a:extLst>
-          </p:cNvPr>
-          <p:cNvSpPr>
-            <a:spLocks noGrp="1"/>
-          </p:cNvSpPr>
-          <p:nvPr>
-            <p:ph type="title"/>
-          </p:nvPr>
-        </p:nvSpPr>
-        <p:spPr/>
-        <p:txBody>
-          <a:bodyPr/>
-          <a:lstStyle/>
-          <a:p>
-            <a:r>
-              <a:rPr lang="en-US" dirty="0"/>
-              <a:t>1991: Top 10 Songs</a:t>
-            </a:r>
-          </a:p>
-        </p:txBody>
-      </p:sp>
-      <p:sp>
-        <p:nvSpPr>
-          <p:cNvPr id="7" name="Content Placeholder 6">
-            <a:extLst>
-              <a:ext uri="{FF2B5EF4-FFF2-40B4-BE49-F238E27FC236}">
-                <a16:creationId xmlns:a16="http://schemas.microsoft.com/office/drawing/2014/main" id="{0F03A1C9-9D76-3CE8-4637-59188B5CCBF4}"/>
-              </a:ext>
-            </a:extLst>
-          </p:cNvPr>
-          <p:cNvSpPr>
-            <a:spLocks noGrp="1"/>
-          </p:cNvSpPr>
-          <p:nvPr>
-            <p:ph idx="1"/>
-          </p:nvPr>
-        </p:nvSpPr>
-        <p:spPr/>
-        <p:txBody>
-          <a:bodyPr/>
-          <a:lstStyle/>
-          <a:p>
-            <a:endParaRPr lang="en-US"/>
-          </a:p>
-        </p:txBody>
-      </p:sp>
-    </p:spTree>
-    <p:extLst>
-      <p:ext uri="{BB962C8B-B14F-4D97-AF65-F5344CB8AC3E}">
-        <p14:creationId xmlns:p14="http://schemas.microsoft.com/office/powerpoint/2010/main" val="345430048"/>
       </p:ext>
     </p:extLst>
   </p:cSld>
